--- a/slides/talk-rl/talk-rl.pptx
+++ b/slides/talk-rl/talk-rl.pptx
@@ -544,7 +544,7 @@
           <a:lstStyle/>
           <a:p>
             <a:r>
-              <a:t>이 발표는 리서치 탭의 강화학습 문서(§R)를 한 시간 안쪽의 이야기로 줄인 것이다. 강의 순서는 버클리 CS 185/285(Sergey Levine)의 2026 봄 슬라이드를 따른다. 강의 내용을 다 옮기지 않고, travplan이 강화학습을 쓰는 세 자리와 이어지는 부분만 골랐다. 마지막에는 2025–2026 연구 비교와 다음에 할 일을 TP 번호와 함께 본다.</a:t>
+              <a:t>이 발표는 리서치 탭의 강화학습 문서(§R)를 한 시간 안쪽의 이야기로 줄인 것이다. 강의 순서는 버클리 CS 185/285(Sergey Levine)의 2026 봄 슬라이드를 따른다. 강의 내용을 다 옮기지 않고, travplan이 강화학습을 쓰는 세 곳과 이어지는 부분만 골랐다. 마지막에는 2025–2026 연구 비교와 다음에 할 일을 TP 번호와 함께 살펴본다.</a:t>
             </a:r>
           </a:p>
         </p:txBody>
@@ -614,7 +614,7 @@
           <a:lstStyle/>
           <a:p>
             <a:r>
-              <a:t>진화 전략은 행동 대신 정책 파라미터에 잡음을 주고, 에피소드 수익만으로 기울기를 근사한다. 파라미터 공간의 REINFORCE라고 보면 된다. TP-0128은 보상이 벤치마크 판정 그 자체라 미분이 안 되므로 OpenAI-ES 250세대로 학습했다. 스워브는 8/12로 MPPI의 12/12에 못 미쳤고, 지도를 끄면 스워브 0/12, 사족 8/12로 떨어졌다. 지도가 실제로 쓰인다는 대조군이다.</a:t>
+              <a:t>진화 전략은 행동 대신 정책 파라미터에 잡음을 주고, 에피소드 return만으로 기울기를 근사한다. 파라미터 공간의 REINFORCE라고 보면 된다. TP-0128은 보상이 벤치마크 판정 그 자체라 미분이 안 되므로 OpenAI-ES 250세대로 학습했다. 스워브는 8/12로 MPPI의 12/12에 못 미쳤고, 지도를 끄면 스워브 0/12, 사족 8/12로 떨어졌다. 지도가 실제로 쓰인다는 대조군이다.</a:t>
             </a:r>
           </a:p>
         </p:txBody>
@@ -684,7 +684,7 @@
           <a:lstStyle/>
           <a:p>
             <a:r>
-              <a:t>critic은 가치 함수를 회귀로 배우고, 한 스텝 부트스트랩 목표는 분산이 작지만 critic이 틀리면 편향을 낳는다. GAE의 λ가 그 사이를 고르고 보통 0.95 안팎을 쓴다. 그림의 critic에는 일부러 사인 오차를 넣어 λ=0의 편향을 보이게 했다. 배포 때는 actor만 쓰므로 critic은 센서에 없는 정보를 써도 된다. travplan은 GT 지도가 있으니 이 비대칭 구조가 잘 맞는다.</a:t>
+              <a:t>critic은 가치 함수를 회귀로 배우고, 한 스텝 부트스트랩 목표는 분산이 작지만 critic이 틀리면 편향을 낳는다. GAE의 λ가 그 사이를 고르고 보통 0.95 안팎을 쓴다. 그림의 critic에는 일부러 사인 오차를 넣어 λ=0의 편향이 보이게 했다. 배포 때는 actor만 쓰므로 critic은 센서에 없는 정보를 써도 된다. travplan은 GT 지도가 있으니 이 비대칭 구조가 잘 맞는다.</a:t>
             </a:r>
           </a:p>
         </p:txBody>
@@ -754,7 +754,7 @@
           <a:lstStyle/>
           <a:p>
             <a:r>
-              <a:t>정책을 한 번에 너무 많이 바꾸면 옛 정책으로 모은 표본이 새 정책에 맞지 않는다. TRPO는 KL 제약을 켤레 기울기와 선 탐색으로 지키고, PPO는 제약 대신 비율을 1±ε로 자른다. PPO는 구현이 쉽고 병렬 시뮬과 잘 맞아 보행·조작·언어 모델의 표준이 됐다. TP-0066의 모방 가중 λ=0.5도 "정책을 조금씩만 바꾼다"는 같은 일을 한다. flow 정책에 PPO를 쓰는 방법은 5장의 FPO에서 다시 본다.</a:t>
+              <a:t>정책을 한 번에 너무 많이 바꾸면 옛 정책으로 모은 샘플이 새 정책에 맞지 않는다. TRPO는 KL 제약을 conjugate gradient와 line search로 지키고, PPO는 제약 대신 비율을 1±ε로 클리핑한다. PPO는 구현이 쉽고 병렬 시뮬과 잘 맞아 보행·조작·언어 모델의 표준이 됐다. TP-0066의 모방 가중 λ=0.5도 "정책을 조금씩만 바꾼다"는 같은 일을 한다. flow 정책에 PPO를 쓰는 방법은 5장의 FPO에서 다시 다룬다.</a:t>
             </a:r>
           </a:p>
         </p:txBody>
@@ -824,7 +824,7 @@
           <a:lstStyle/>
           <a:p>
             <a:r>
-              <a:t>셋째 장은 가치를 배워 행동을 고르는 쪽이다. Q-learning은 off-policy라 자료를 다시 쓸 수 있지만, max가 과대평가를 낳는다. 새 상호작용 없이 모은 자료로만 배우는 오프라인 RL에서는 이 문제가 가장 크게 드러난다. TP-0066이 쓰는 AWR이 이 장의 결론이다.</a:t>
+              <a:t>셋째 장은 가치를 배워 행동을 고르는 쪽이다. Q-learning은 off-policy라 데이터를 다시 쓸 수 있지만, max가 과대평가를 낳는다. 새 상호작용 없이 모은 데이터로만 배우는 오프라인 RL에서는 이 문제가 가장 크게 드러난다. TP-0066이 쓰는 AWR이 이 장의 결론이다.</a:t>
             </a:r>
           </a:p>
         </p:txBody>
@@ -894,7 +894,7 @@
           <a:lstStyle/>
           <a:p>
             <a:r>
-              <a:t>Q-learning은 Bellman 식의 고정점으로 행동 가치를 배우고, 그 최댓값을 내는 행동을 고른다. 자료는 어떤 정책이 모은 것이어도 되므로 off-policy다. 대신 함수 근사와 함께 쓰면 수렴이 보장되지 않는다. 그림 (c)처럼 추정에 잡음만 있어도 max는 위로 치우치고, Double Q가 이를 줄인다. MPPI의 최솟값 선택도 같은 원리라서, 3장의 문제는 Controller에도 있다.</a:t>
+              <a:t>Q-learning은 Bellman 식의 고정점으로 행동 가치를 배우고, 그 최댓값을 내는 행동을 고른다. 데이터는 어떤 정책이 모은 것이어도 되므로 off-policy다. 대신 함수 근사와 함께 쓰면 수렴이 보장되지 않는다. 그림 (c)처럼 추정에 잡음만 있어도 max는 위로 편향되고, Double Q가 이를 줄인다. MPPI의 최솟값 선택도 같은 원리라서, 3장의 문제는 Controller에도 있다.</a:t>
             </a:r>
           </a:p>
         </p:txBody>
@@ -964,7 +964,7 @@
           <a:lstStyle/>
           <a:p>
             <a:r>
-              <a:t>오프라인 RL은 자료를 모은 정책보다 나은 정책을 같은 자료로 찾는다. 새로 해 볼 수 없다는 점이 온라인과 다르다. Q-learning을 그대로 쓰면 max가 자료에 없는 행동의 틀린 값을 고르고, 해 볼 수 없으니 그 믿음이 고쳐지지 않는다. 그림의 빨간 선이 그 실패다. 세 방법은 이 행동을 다루는 방식이 다르다. AWR은 정책이 자료의 행동만 따라 하게 묶는다. CQL은 Q를 배울 때 자료 밖 행동의 값을 일부러 깎는다. IQL은 가치를 배울 때부터 자료 안 행동만 쓴다. Planner D가 Guidance와 다른 경로를 내면 그 결과는 기록에 없으므로, results/의 기록만으로 학습할 때는 이 실패를 먼저 의심해야 한다.</a:t>
+              <a:t>오프라인 RL은 데이터를 모은 정책보다 나은 정책을 같은 데이터로 찾는다. 새로 해 볼 수 없다는 점이 온라인과 다르다. Q-learning을 그대로 쓰면 max가 데이터에 없는 행동의 틀린 값을 고르고, 해 볼 수 없으니 그 믿음이 고쳐지지 않는다. 그림의 빨간 선이 그 실패다. 세 방법은 이 행동을 다루는 방식이 다르다. AWR은 정책이 데이터의 행동만 따라 하게 제약한다. CQL은 Q를 배울 때 데이터 밖 행동의 값을 일부러 깎는다. IQL은 가치를 배울 때부터 데이터 안 행동만 쓴다. Planner D가 Guidance와 다른 경로를 내면 그 결과는 기록에 없으므로, results/의 기록만으로 학습할 때는 이 실패를 먼저 의심해야 한다.</a:t>
             </a:r>
           </a:p>
         </p:txBody>
@@ -1034,7 +1034,7 @@
           <a:lstStyle/>
           <a:p>
             <a:r>
-              <a:t>KL 제약 아래 최적 정책은 자료 정책에 이점의 지수를 곱한 꼴이다. 그래서 자료의 행동을 그 지수로 가중해 행동 복제하면 최적 정책에 투영된다. 이것이 AWR이고, IQL도 정책은 AWR로 뽑는다. TP-0066은 flow matching 손실을 이 가중으로 곱한 것이다. 나중에 FPO++로 넘어가자는 제안은 이 회귀를 PPO의 자른 목표로 바꾸자는 뜻이다.</a:t>
+              <a:t>KL 제약 아래 최적 정책은 데이터를 모은 정책에 advantage의 지수를 곱한 꼴이다. 그래서 데이터의 행동을 그 지수로 가중해 행동 복제하면 최적 정책에 투영된다. 이것이 AWR이고, IQL도 정책은 AWR로 뽑는다. TP-0066은 flow matching 손실을 이 가중으로 곱한 것이다. 나중에 FPO++로 넘어가자는 제안은 이 회귀를 PPO의 클리핑한 목표로 바꾸자는 뜻이다.</a:t>
             </a:r>
           </a:p>
         </p:txBody>
@@ -1104,7 +1104,7 @@
           <a:lstStyle/>
           <a:p>
             <a:r>
-              <a:t>CQL은 Conservative Q-Learning, 보수적인 Q 학습이다. 보통의 Q-learning 손실에 벌점 하나를 더한다. 벌점의 앞 항은 모든 행동에 걸친 로그합지수, 즉 부드러운 최댓값이다. 이것을 줄이면 Q가 큰 행동부터 내려간다. 뒤 항은 자료에 실제로 있는 행동의 Q를 다시 올린다. 그래서 자료에 있는 행동은 제자리에 가깝고, 자료에 없는데 Q만 높던 행동이 깎인다. 숫자 예에서 a₃는 자료에 없는데 Q가 1.5로 가장 높았다. 벌점의 기울기만 보면 a₃가 0.54만큼 내려가고 자료의 두 행동은 오히려 올라간다. 이렇게 배운 Q는 참값보다 낮은 쪽, 즉 보수적인 추정이 된다. 손잡이는 α 하나다. 너무 크면 자료 밖의 좋은 행동까지 깎여 자료 정책에서 거의 못 벗어난다. 행동이 연속이면 앞 항의 합을 표본으로 근사해야 해서 계산이 든다.</a:t>
+              <a:t>CQL은 Conservative Q-Learning, 보수적인 Q 학습이다. 보통의 Q-learning 손실에 페널티 하나를 더한다. 페널티의 앞 항은 모든 행동에 걸친 log-sum-exp, 즉 soft max다. 이것을 줄이면 Q가 큰 행동부터 내려간다. 뒤 항은 데이터에 실제로 있는 행동의 Q를 다시 올린다. 그래서 데이터에 있는 행동은 제자리에 가깝고, 데이터에 없는데 Q만 높던 행동이 깎인다. 숫자 예에서 a₃는 데이터에 없는데 Q가 1.5로 가장 높았다. 페널티의 기울기만 보면 a₃가 0.54만큼 내려가고 데이터의 두 행동은 오히려 올라간다. 이렇게 배운 Q는 참값보다 낮은 쪽, 즉 보수적인 추정이 된다. 하이퍼파라미터는 α 하나다. 너무 크면 데이터 밖의 좋은 행동까지 깎여 데이터를 모은 정책에서 거의 못 벗어난다. 행동이 연속이면 앞 항의 합을 샘플로 근사해야 해서 계산이 든다.</a:t>
             </a:r>
           </a:p>
         </p:txBody>
@@ -1174,7 +1174,7 @@
           <a:lstStyle/>
           <a:p>
             <a:r>
-              <a:t>IQL은 Implicit Q-Learning이다. Q-learning 목표의 max가 문제라면, max를 아예 쓰지 않는다. 대신 상태 가치 V를 따로 두고, 자료에 있는 행동들의 Q 가운데 높은 쪽을 V가 맞추게 한다. 이때 쓰는 것이 expectile이다. Q가 V보다 큰 쪽의 오차에 τ, 작은 쪽에 1 − τ를 곱해 제곱 오차를 세면, τ가 0.5일 때는 평균이 되고 1에 가까울수록 최댓값 쪽으로 간다. 숫자 예에서 τ = 0.9면 0.80으로, 자료 안 최댓값 0.9에 가깝다. Q는 다음 상태의 V로 배우므로 학습 내내 자료 밖 행동의 Q를 한 번도 계산하지 않는다. 그래서 이름이 implicit, 암묵적이다. 마지막으로 정책은 AWR과 같은 가중 행동 복제로 뽑는다. 손잡이는 τ와 β 둘이다. 약점은 자료에 없는 행동을 끝까지 고르지 못한다는 점이다.</a:t>
+              <a:t>IQL은 Implicit Q-Learning이다. Q-learning 목표의 max가 문제라면, max를 아예 쓰지 않는다. 대신 상태 가치 V를 따로 두고, 데이터에 있는 행동들의 Q 가운데 높은 쪽을 V가 맞추게 한다. 이때 쓰는 것이 expectile이다. Q가 V보다 큰 쪽의 오차에 τ, 작은 쪽에 1 − τ를 곱해 제곱 오차를 세면, τ가 0.5일 때는 평균이 되고 1에 가까울수록 최댓값 쪽으로 간다. 숫자 예에서 τ = 0.9면 0.80으로, 데이터 안 최댓값 0.9에 가깝다. Q는 다음 상태의 V로 배우므로 학습 내내 데이터 밖 행동의 Q를 한 번도 계산하지 않는다. 그래서 이름이 implicit, 암묵적이다. 마지막으로 정책은 AWR과 같은 가중 행동 복제로 뽑는다. 하이퍼파라미터는 τ와 β 둘이다. 약점은 데이터에 없는 행동을 끝까지 고르지 못한다는 점이다.</a:t>
             </a:r>
           </a:p>
         </p:txBody>
@@ -1244,7 +1244,7 @@
           <a:lstStyle/>
           <a:p>
             <a:r>
-              <a:t>세 방법을 한 표로 놓았다. 모두 같은 문제, 즉 자료에 없는 행동의 값을 믿지 않으려는 방법이다. AWR은 정책 쪽에서 막는다. 정책이 자료의 행동만 다시 가중하므로 자료 밖 행동을 고를 수가 없다. CQL은 가치 쪽에서 막는다. Q 자체를 자료 밖에서 낮게 배운다. IQL도 가치 쪽이지만 깎는 대신 묻지 않는다. 비유로 말하면 지도에 없는 길을 AWR은 아예 안 가고, CQL은 감점을 주고 갈지 말지 따지고, IQL은 점수를 매기지 않는다. travplan의 TP-0066은 매 라운드 후보를 새로 뽑으므로 순수 오프라인은 아니고 AWR 쪽이다. 벤치마크 기록만으로 배우는 다음 후보 4는 순수 오프라인이라, 자료 밖 질문이 없는 IQL식으로 시작한다.</a:t>
+              <a:t>세 방법을 한 표로 놓았다. 모두 같은 문제, 즉 데이터에 없는 행동의 값을 믿지 않으려는 방법이다. AWR은 정책 쪽에서 막는다. 정책이 데이터의 행동만 다시 가중하므로 데이터 밖 행동을 고를 수가 없다. CQL은 가치 쪽에서 막는다. Q 자체를 데이터 밖에서 낮게 배운다. IQL도 가치 쪽이지만 깎는 대신 묻지 않는다. 비유로 말하면 지도에 없는 길을 AWR은 아예 안 가고, CQL은 감점을 주고 갈지 말지 따지고, IQL은 점수를 매기지 않는다. travplan의 TP-0066은 매 라운드 후보를 새로 뽑으므로 순수 오프라인은 아니고 AWR 쪽이다. 벤치마크 기록만으로 배우는 다음 후보 4는 순수 오프라인이라, 데이터 밖 질문이 없는 IQL식으로 시작한다.</a:t>
             </a:r>
           </a:p>
         </p:txBody>
@@ -1314,7 +1314,7 @@
           <a:lstStyle/>
           <a:p>
             <a:r>
-              <a:t>앞의 다섯 장은 강의 순서를 따르고, 각 장의 끝에서 travplan의 어느 코드와 실험에 닿는지 한 줄로 묶는다. 6장은 최근 연구 14편을 한 표로 보고, 7장은 우리가 잰 결과와 다음 후보다. 이론·다과제 탭(R.14, R.15)은 7장의 판정 통계와 6장의 비교표 안에 녹였다.</a:t>
+              <a:t>앞의 다섯 장은 강의 순서를 따르고, 각 장의 끝에서 travplan의 어느 코드와 실험에 닿는지 한 줄로 정리한다. 6장은 최근 연구 14편을 한 표로 비교하고, 7장은 우리가 잰 결과와 다음 후보를 다룬다. 이론·다과제 탭(R.14, R.15)은 7장의 판정 통계와 6장의 비교표 안에 녹였다.</a:t>
             </a:r>
           </a:p>
         </p:txBody>
@@ -1384,7 +1384,7 @@
           <a:lstStyle/>
           <a:p>
             <a:r>
-              <a:t>넷째 장은 travplan의 Controller가 강의의 어디에 있는지 보는 장이다. 제어를 추론으로 보면 SAC와 MPPI가 같은 식에서 나온다. 그리고 MPPI가 모델 기반 계획이라는 점에서, 모델이 틀릴 때 무슨 일이 생기는지가 따라 나온다. TP-0149–0150의 plant 지연 문제가 그 실례다.</a:t>
+              <a:t>넷째 장은 travplan의 Controller가 강의의 어디에 있는지 살펴보는 장이다. 제어를 추론으로 보면 SAC와 MPPI가 같은 식에서 나온다. 그리고 MPPI가 모델 기반 계획이라는 점에서, 모델이 틀릴 때 무슨 일이 생기는지가 따라 나온다. TP-0149–0150의 plant 지연 문제가 그 실례다.</a:t>
             </a:r>
           </a:p>
         </p:txBody>
@@ -1454,7 +1454,7 @@
           <a:lstStyle/>
           <a:p>
             <a:r>
-              <a:t>각 시각에 "이 스텝이 최적이다"라는 이진 변수를 두고 그 확률을 보상의 지수로 정하면, 최적 궤적의 사후분포가 나온다. 이 사후분포를 정책으로 근사하면 엔트로피 보너스가 붙은 최대 엔트로피 RL이 되고, SAC가 그 actor-critic 판이다. 정책을 배우지 않고 매 스텝 행동열을 직접 추론하면 MPPI가 된다. 그래서 MPPI의 사후분포를 정하는 것은 비용과 모델 둘이다.</a:t>
+              <a:t>각 시각에 "이 스텝이 최적이다"라는 이진 변수를 두고 그 확률을 보상의 지수로 정하면, 최적 궤적의 사후분포가 나온다. 이 사후분포를 정책으로 근사하면 엔트로피 보너스가 붙은 최대 엔트로피 RL이 되고, SAC가 그 actor-critic 버전이다. 정책을 배우지 않고 매 스텝 행동열을 직접 추론하면 MPPI가 된다. 그래서 MPPI의 사후분포를 정하는 것은 비용과 모델 둘이다.</a:t>
             </a:r>
           </a:p>
         </p:txBody>
@@ -1524,7 +1524,7 @@
           <a:lstStyle/>
           <a:p>
             <a:r>
-              <a:t>온도를 낮추면 가장 좋은 표본 하나만 쓰고, 높이면 모든 표본의 평균에 가까워진다. 엔트로피 보너스의 크기를 고르는 것과 같은 선택이다. 그림처럼 온도가 너무 높으면 두 골짜기를 평균해 가운데 언덕, 곧 치명 셀 쪽으로 갈 수 있다. travplan은 비용 범위로 정규화하지 않으므로, 비용 항의 크기를 바꾸면 사실상 온도도 바뀐다는 점을 기억해야 한다.</a:t>
+              <a:t>온도를 낮추면 가장 좋은 샘플 하나만 쓰고, 높이면 모든 샘플의 평균에 가까워진다. 엔트로피 보너스의 크기를 고르는 것과 같은 선택이다. 그림처럼 온도가 너무 높으면 두 골짜기를 평균해 가운데 언덕, 곧 치명 셀 쪽으로 갈 수 있다. travplan은 비용 범위로 정규화하지 않으므로, 비용 항의 크기를 바꾸면 사실상 온도도 바뀐다는 점을 기억해야 한다.</a:t>
             </a:r>
           </a:p>
         </p:txBody>
@@ -1594,7 +1594,7 @@
           <a:lstStyle/>
           <a:p>
             <a:r>
-              <a:t>전이 모델을 배우면 실제 상호작용 없이 머릿속으로 굴려 볼 수 있어 표본 효율이 가장 높다. 대신 계획기는 모델이 실제보다 좋게 보는 행동을 골라낸다. 그림 (b)가 그 모습이고, 비관적 목표가 이를 막는다. 그림 (c)처럼 한 스텝 오차가 작아도 길게 굴리면 오차가 쌓인다. 매 스텝 다시 계획하는 MPC도 모델이 체계적으로 틀리면 다 고치지 못한다.</a:t>
+              <a:t>전이 모델을 배우면 실제 상호작용 없이 모델 안에서 rollout해 볼 수 있어 샘플 효율이 가장 높다. 대신 계획기는 모델이 실제보다 좋게 보는 행동을 골라낸다. 그림 (b)가 그 모습이고, 비관적 목표가 이를 막는다. 그림 (c)처럼 한 스텝 오차가 작아도 길게 rollout하면 오차가 쌓인다. 매 스텝 다시 계획하는 MPC도 모델이 체계적으로 틀리면 다 고치지 못한다.</a:t>
             </a:r>
           </a:p>
         </p:txBody>
@@ -1734,7 +1734,7 @@
           <a:lstStyle/>
           <a:p>
             <a:r>
-              <a:t>다섯째 장은 언어 모델의 RL에서 시작한다. 그룹 이점을 쓰는 GRPO가 TP-0066의 계산과 같기 때문이다. 이어서 diffusion·flow 정책을 강화학습에 넣는 2024–2026년 방법들을 본다. 마지막으로 평균이 아니라 꼬리를 보는 안전 RL을 travplan의 치명 원칙과 잇는다.</a:t>
+              <a:t>다섯째 장은 언어 모델의 RL에서 시작한다. 그룹 advantage를 쓰는 GRPO가 TP-0066의 계산과 같기 때문이다. 이어서 diffusion·flow 정책을 강화학습에 넣는 2024–2026년 방법들을 살펴본다. 마지막으로 평균이 아니라 꼬리를 보는 안전 RL을 travplan의 치명 원칙과 잇는다.</a:t>
             </a:r>
           </a:p>
         </p:txBody>
@@ -1804,7 +1804,7 @@
           <a:lstStyle/>
           <a:p>
             <a:r>
-              <a:t>언어 모델도 토큰을 행동으로 고르는 정책이다. RLHF는 사람 선호로 보상 모델을 배우고 KL 항으로 원래 모델에서 너무 멀어지지 않게 묶는다. DPO는 보상 모델 없이 선호 쌍으로 바로 학습한다. GRPO는 같은 질문의 응답 G개를 그룹으로 정규화해 이점으로 쓰므로 critic이 필요 없다. 경로 쌍 가운데 어느 쪽이 나은지만 알아도 DPO로 Planner D를 조정할 수 있다는 점도 기억해 둘 만하다.</a:t>
+              <a:t>언어 모델도 토큰을 행동으로 고르는 정책이다. RLHF는 사람 선호로 보상 모델을 배우고 KL 항으로 원래 모델에서 너무 멀어지지 않게 제약한다. DPO는 보상 모델 없이 선호 쌍으로 바로 학습한다. GRPO는 같은 질문의 응답 G개를 그룹으로 정규화해 advantage로 쓰므로 critic이 필요 없다. 경로 쌍 가운데 어느 쪽이 나은지만 알아도 DPO로 Planner D를 조정할 수 있다는 점도 기억해 둘 만하다.</a:t>
             </a:r>
           </a:p>
         </p:txBody>
@@ -1874,7 +1874,7 @@
           <a:lstStyle/>
           <a:p>
             <a:r>
-              <a:t>diffusion·flow 정책은 다봉 행동을 잘 내지만 로그 확률을 바로 계산하기 어렵다. PPO 비율의 재료가 없는 셈이다. 방법은 넷으로 묶인다. denoising을 MDP로 펼치거나, 손실 차이로 비율을 대신하거나, 잡음을 넣어 가능도를 계산하거나, critic의 기울기로 점수를 맞춘다. FPO는 MuJoCo Playground 10과제 평균 보상이 759 대 668(가우시안 PPO)이었다.</a:t>
+              <a:t>diffusion·flow 정책은 multimodal 행동을 잘 내지만 log-probability를 바로 계산하기 어렵다. PPO 비율의 재료가 없는 셈이다. 방법은 넷으로 나뉜다. denoising을 MDP로 펼치거나, 손실 차이로 비율을 대신하거나, 잡음을 넣어 likelihood를 계산하거나, critic의 기울기로 score를 맞춘다. FPO는 MuJoCo Playground 10과제 평균 보상이 759 대 668(가우시안 PPO)이었다.</a:t>
             </a:r>
           </a:p>
         </p:txBody>
@@ -1944,7 +1944,7 @@
           <a:lstStyle/>
           <a:p>
             <a:r>
-              <a:t>FPO++는 같은 저자군이 FPO의 불안정을 직접 보고하고 고친 판이다. IsaacLab에서 Go2, Spot, H1, G1 보행을 환경 4096개로 학습했고, Booster T1과 G1을 실물에 옮겼다. 시험 때 잡음을 0에서 시작하는 zero-sampling은 조작 과제의 기본 정책 성공을 약 10 %에서 70 % 넘게 올렸다. 다만 잡음 0은 후보 16개의 다양성을 없애므로, Planner D에서는 후보 하나만 잡음 0으로 두는 식으로 섞어야 한다.</a:t>
+              <a:t>FPO++는 같은 저자군이 FPO의 불안정을 직접 보고하고 고친 버전이다. IsaacLab에서 Go2, Spot, H1, G1 보행을 환경 4096개로 학습했고, Booster T1과 G1을 실물에 옮겼다. 시험 때 잡음을 0에서 시작하는 zero-sampling은 조작 과제의 기본 정책 성공을 약 10 %에서 70 % 넘게 올렸다. 다만 잡음 0은 후보 16개의 다양성을 없애므로, Planner D에서는 후보 하나만 잡음 0으로 두는 식으로 섞어야 한다.</a:t>
             </a:r>
           </a:p>
         </p:txBody>
@@ -2084,7 +2084,7 @@
           <a:lstStyle/>
           <a:p>
             <a:r>
-              <a:t>강화학습은 travplan에 새로 들일 기술이 아니라 이미 세 곳에서 돌고 있다. Planner D는 Guidance 시연을 행동 복제한 뒤 폐루프 점수로 다듬고, Playground의 작은 Controller는 진화 전략으로 배웠다. MPPI도 넓게 보면 모델을 굴려 행동을 고르는 모델 기반 강화학습의 한 형태다. 오늘의 목표는 이 세 자리가 강의의 어느 절에 기대는지 보고, 다음 자리를 정하는 것이다.</a:t>
+              <a:t>강화학습은 travplan에 새로 들일 기술이 아니라 이미 세 곳에서 돌고 있다. Planner D는 Guidance 시연을 행동 복제한 뒤 폐루프 점수로 fine-tuning했고, Playground의 작은 Controller는 진화 전략으로 배웠다. MPPI도 넓게 보면 모델을 rollout해 행동을 고르는 모델 기반 강화학습의 한 형태다. 오늘의 목표는 이 세 곳이 강의의 어느 절에 기대는지 확인하고, 다음에 쓸 곳을 정하는 것이다.</a:t>
             </a:r>
           </a:p>
         </p:txBody>
@@ -2154,7 +2154,7 @@
           <a:lstStyle/>
           <a:p>
             <a:r>
-              <a:t>여섯째 장은 2025–2026년 로봇 RL 14편을 한 표로 본다. 강의에서 본 갈래가 최근 연구에서 어떻게 섞이는지가 요점이다. 표 두 장, 공통점, 차이점의 축, 그리고 travplan이 시도할 순서를 차례로 본다.</a:t>
+              <a:t>여섯째 장은 2025–2026년 로봇 RL 14편을 한 표로 비교한다. 강의에서 본 갈래가 최근 연구에서 어떻게 섞이는지가 요점이다. 표 두 장, 공통점, 차이점의 축, 그리고 travplan이 시도할 순서를 차례로 살펴본다.</a:t>
             </a:r>
           </a:p>
         </p:txBody>
@@ -2224,7 +2224,7 @@
           <a:lstStyle/>
           <a:p>
             <a:r>
-              <a:t>2025년 연구 일곱 편이다. 공통 출발점은 행동 복제한 생성 정책이고, 다듬는 방법이 갈린다. ReinFlow는 가능도를 계산하고, DSRL은 잡음만 배우고, Q-chunking은 critic으로 고른다. SPiDR는 안전 쪽, Dreamer 4는 배운 모델 안에서 배우는 쪽이다. FastSAC는 병렬 시뮬에서는 off-policy가 PPO보다 빨리 배운다는 레시피다.</a:t>
+              <a:t>2025년 연구 일곱 편이다. 공통 출발점은 행동 복제한 생성 정책이고, fine-tuning 방법이 갈린다. ReinFlow는 likelihood를 계산하고, DSRL은 잡음만 배우고, Q-chunking은 critic으로 고른다. SPiDR는 안전 쪽, Dreamer 4는 배운 모델 안에서 배우는 쪽이다. FastSAC는 병렬 시뮬에서는 off-policy가 PPO보다 빨리 배운다는 레시피다.</a:t>
             </a:r>
           </a:p>
         </p:txBody>
@@ -2364,7 +2364,7 @@
           <a:lstStyle/>
           <a:p>
             <a:r>
-              <a:t>다섯 공통점 가운데 처음 둘은 Planner D가 이미 한다. 시연으로 시작했고, AWR 가중으로 로그 확률을 피했다. 셋째인 critic 견제는 critic이 없어서 아직 해당이 없다. 넷째인 지연은 Controller 쪽 TP-0150에서는 했지만 후학습에는 넣지 않았다. 다섯째는 TP-0153의 GPU 경로가 첫걸음이다.</a:t>
+              <a:t>다섯 공통점 가운데 처음 둘은 Planner D가 이미 한다. 시연으로 시작했고, AWR 가중으로 log-probability 계산을 피했다. 셋째인 critic 오류 방지는 critic이 없어서 아직 해당이 없다. 넷째인 지연은 Controller 쪽 TP-0150에서는 했지만 후학습에는 넣지 않았다. 다섯째는 TP-0153의 GPU 경로가 첫걸음이다.</a:t>
             </a:r>
           </a:p>
         </p:txBody>
@@ -2434,7 +2434,7 @@
           <a:lstStyle/>
           <a:p>
             <a:r>
-              <a:t>다섯 축은 서로 독립이라 조합으로 논문을 읽을 수 있다. travplan은 지금 on-policy, 가중치를 고침, 시뮬을 직접 굴림, 학습 뒤 판정, 평균 점수 쪽에 있다. 위험의 척도만은 판정 규칙이 이미 꼬리 쪽이다. 다음 시도는 이 가운데 한 축씩만 바꿔 효과를 가르는 것이 좋다.</a:t>
+              <a:t>다섯 축은 서로 독립이라 조합으로 논문을 읽을 수 있다. travplan은 지금 on-policy, 가중치를 고침, 시뮬을 직접 돌림, 학습 뒤 판정, 평균 점수 쪽에 있다. 위험의 척도만은 판정 규칙이 이미 꼬리 쪽이다. 다음 시도는 이 가운데 한 축씩만 바꿔 효과를 가르는 것이 좋다.</a:t>
             </a:r>
           </a:p>
         </p:txBody>
@@ -2504,7 +2504,7 @@
           <a:lstStyle/>
           <a:p>
             <a:r>
-              <a:t>순서는 지금의 병목과 비용으로 정했다. 병목은 plant 레벨 3의 시간 초과이고, curb_ramp 86/90은 plant 로봇의 설계 한계로 본다(TP-0151). 1번은 L0 기록만 쓰므로 가장 싸고, 경사로 밖의 멈춤을 겨눈다. 4번은 L1 GPU와 plant 변형 n배 비용이 들어 마지막이다. 픽셀 world model과 HJ 학습은 정확한 운동학 시뮬과 GT 지도가 있어 지금 들이지 않는다.</a:t>
+              <a:t>순서는 지금의 병목과 비용으로 정했다. 병목은 plant 레벨 3의 시간 초과이고, curb_ramp 86/90은 plant 로봇의 설계 한계로 본다(TP-0151). 1번은 L0 기록만 쓰므로 가장 싸고, 경사로 밖의 멈춤을 겨눈다. 4번은 L1 GPU와 plant 변형 n배 비용이 들어 마지막이다. 픽셀 world model과 HJ 학습은 정확한 운동학 시뮬과 GT 지도가 있어 지금은 하지 않는다.</a:t>
             </a:r>
           </a:p>
         </p:txBody>
@@ -2644,7 +2644,7 @@
           <a:lstStyle/>
           <a:p>
             <a:r>
-              <a:t>planner_d_L0123_dagger.pt에서 출발해 지형 64개 × MPPI·pure pursuit로 3 라운드를 돌렸다. 평가는 학습에 쓰지 않은 seed의 curb_ramp 레벨 3, 30 에피소드다. 단독은 DAgger의 20/30에서 26/30으로 올랐고, 폴백과 함께면 30/30이다. 폴백이 이긴 계획이 51 %에서 42 %로 준 것은 학습 표본 자체가 나아졌다는 뜻이다. 체크포인트는 planner_d_L0123_rl.pt다.</a:t>
+              <a:t>planner_d_L0123_dagger.pt에서 출발해 지형 64개 × MPPI·pure pursuit로 3 라운드를 돌렸다. 평가는 학습에 쓰지 않은 seed의 curb_ramp 레벨 3, 30 에피소드다. 단독은 DAgger의 20/30에서 26/30으로 올랐고, 폴백과 함께면 30/30이다. 폴백이 이긴 계획이 51 %에서 42 %로 준 것은 학습 샘플 자체가 나아졌다는 뜻이다. 체크포인트는 planner_d_L0123_rl.pt다.</a:t>
             </a:r>
           </a:p>
         </p:txBody>
@@ -2714,7 +2714,7 @@
           <a:lstStyle/>
           <a:p>
             <a:r>
-              <a:t>한 라운드는 문서의 절 넷을 차례로 지난다. 정책은 본 것(belief)으로 고르고, 점수는 실제로 있는 것(GT 지도)으로 받는다. 가장 좋은 후보는 이점 +1.39, 치명 후보는 −2.04이고, softmax 가중으로는 30배 차이다. 여기에 원래 시연의 모방 손실을 가중 0.5로 더한다. 1–3은 정책 기울기의 재료이고, 4는 기울기 대신 가중 회귀라서 TP-0066은 on-policy 표본을 쓰는 AWR이다.</a:t>
+              <a:t>한 라운드는 문서의 절 넷을 차례로 지난다. 정책은 본 것(belief)으로 고르고, 점수는 실제로 있는 것(GT 지도)으로 받는다. 가장 좋은 후보는 advantage +1.39, 치명 후보는 −2.04이고, softmax 가중으로는 30배 차이다. 여기에 원래 시연의 모방 손실을 가중 0.5로 더한다. 1–3은 정책 기울기의 재료이고, 4는 기울기 대신 가중 회귀라서 TP-0066은 on-policy 샘플을 쓰는 AWR이다.</a:t>
             </a:r>
           </a:p>
         </p:txBody>
@@ -2854,7 +2854,7 @@
           <a:lstStyle/>
           <a:p>
             <a:r>
-              <a:t>강의 1의 논지는 자료로 배우는 학습이 세상을 이해하게 하고, 최적화가 그 이해로 자료에 없던 행동을 만든다는 것이다. 지도학습과 다른 점은 둘이다. 정답 대신 점수를 받고, 내 행동이 다음 입력을 바꾼다. travplan은 왼쪽 열로 시작해 오른쪽 열로 다듬는다. 시뮬레이터가 있어 최적화를 쓸 수 있다는 점이, 우리가 운동학 시뮬과 plant에 공을 들이는 이유다.</a:t>
+              <a:t>강의 1의 논지는 데이터로 배우는 학습이 세상을 이해하게 하고, 최적화가 그 이해로 데이터에 없던 행동을 만든다는 것이다. 지도학습과 다른 점은 둘이다. 정답 대신 점수를 받고, 내 행동이 다음 입력을 바꾼다. travplan은 왼쪽 열로 시작해 오른쪽 열로 fine-tuning한다. 시뮬레이터가 있어 최적화를 쓸 수 있다는 점이, 우리가 운동학 시뮬과 plant에 공을 들이는 이유다.</a:t>
             </a:r>
           </a:p>
         </p:txBody>
@@ -2994,7 +2994,7 @@
           <a:lstStyle/>
           <a:p>
             <a:r>
-              <a:t>R.16의 다음 후보는 효과가 클 것부터 적은 목록이다. TP-0149–0154에서 plant와 L1이 성적을 크게 바꿨으므로, rollout도 그 조건이어야 한다는 것이 1번의 이유다. 다만 R.19에서 최근 연구와 맞대 보고 비용을 따지자, 가장 싼 critic 선택기를 먼저 하고 plant·L1 섭동 미세조정을 마지막에 두게 됐다. 두 목록은 같은 후보를 다른 기준으로 세운 것이다.</a:t>
+              <a:t>R.16의 다음 후보는 효과가 클 것부터 적은 목록이다. TP-0149–0154에서 plant와 L1이 성적을 크게 바꿨으므로, rollout도 그 조건이어야 한다는 것이 1번의 이유다. 다만 R.19에서 최근 연구와 맞대 보고 비용을 따지자, 가장 싼 critic 선택기를 먼저 하고 plant·L1 섭동 fine-tuning을 마지막에 두게 됐다. 두 목록은 같은 후보를 다른 기준으로 세운 것이다.</a:t>
             </a:r>
           </a:p>
         </p:txBody>
@@ -3064,7 +3064,7 @@
           <a:lstStyle/>
           <a:p>
             <a:r>
-              <a:t>오늘의 요점은 세 줄이다. travplan은 이미 강화학습을 세 자리에서 쓴다. 최근 연구와 비교하면 빠진 것은 critic, 현실적 rollout, 꼬리 안전 신호다. 무엇을 시도하든 판정은 3판 짝 비교와 치명 원칙으로 한다. 공부는 오른쪽 순서로 2023 영상을 보면 travplan의 세 자리를 모두 따라갈 수 있다.</a:t>
+              <a:t>오늘의 요점은 세 줄이다. travplan은 이미 강화학습을 세 곳에서 쓴다. 최근 연구와 비교하면 빠진 것은 critic, 현실적 rollout, 꼬리 안전 신호다. 무엇을 시도하든 판정은 3판 짝 비교와 치명 원칙으로 한다. 공부는 오른쪽 순서로 2023 영상을 보면 travplan의 세 곳을 모두 따라갈 수 있다.</a:t>
             </a:r>
           </a:p>
         </p:txBody>
@@ -3204,7 +3204,7 @@
           <a:lstStyle/>
           <a:p>
             <a:r>
-              <a:t>첫 장은 문제를 세운다. 신용 할당은 도달 보상이 에피소드 끝에 한 번 오므로 어느 행동이 공을 세웠는지 모른다는 것이다. 탐색은 해 보지 않은 행동의 결과를 모른다는 것이다. 분포 이동은 정책이 바뀌면 만나는 상태도 바뀐다는 것이다. 이 셋이 뒤의 모든 방법이 푸는 문제다.</a:t>
+              <a:t>첫 장은 문제를 세운다. credit assignment는 도달 보상이 에피소드 끝에 한 번 오므로 어느 행동이 공을 세웠는지 모른다는 것이다. 탐색은 해 보지 않은 행동의 결과를 모른다는 것이다. 분포 이동은 정책이 바뀌면 만나는 상태도 바뀐다는 것이다. 이 셋이 뒤의 모든 방법이 푸는 문제다.</a:t>
             </a:r>
           </a:p>
         </p:txBody>
@@ -3274,7 +3274,7 @@
           <a:lstStyle/>
           <a:p>
             <a:r>
-              <a:t>MDP는 상태, 행동, 전이 확률, 보상으로 정하고, 목표는 정책이 만드는 궤적 분포 위에서 수익의 기댓값을 키우는 것이다. 두 가치 함수는 Bellman 식으로 서로를 정의한다. 알고리즘은 이 식의 어느 쪽을 배우느냐로 갈린다. 정책을 배우면 정책 기울기, 행동 가치를 배우면 Q-learning, 전이를 배우면 모델 기반이다. 로봇은 상태 전체를 보지 못하므로 실제로는 부분 관측 MDP이고, travplan의 belief 지도가 그 믿음 상태에 해당한다.</a:t>
+              <a:t>MDP는 상태, 행동, 전이 확률, 보상으로 정의하고, 목표는 정책이 만드는 궤적 분포 위에서 return의 기댓값을 키우는 것이다. 두 가치 함수는 Bellman 식으로 서로를 정의한다. 알고리즘은 이 식의 어느 쪽을 배우느냐로 갈린다. 정책을 배우면 정책 기울기, 행동 가치를 배우면 Q-learning, 전이를 배우면 모델 기반이다. 로봇은 상태 전체를 보지 못하므로 실제로는 부분 관측 MDP이고, travplan의 belief 지도가 그 belief 상태에 해당한다.</a:t>
             </a:r>
           </a:p>
         </p:txBody>
@@ -3344,7 +3344,7 @@
           <a:lstStyle/>
           <a:p>
             <a:r>
-              <a:t>행동 복제는 시연을 지도학습 자료로 보고 로그 가능도를 키운다. 문제는 한 번 틀리면 시연자가 가 본 적 없는 상태에 들어가고, 거기서 더 틀린다는 것이다. 대책은 실행 분포에서 라벨을 다시 모으는 DAgger, 다봉 분포를 담는 표현력 큰 모델, 복구가 담긴 자료다. Planner D의 시연은 Guidance + MPPI 교사가 만들어 복구 장면이 적다. 그림 (c)의 평균 문제는 Planner D가 가우시안이 아닌 flow matching을 고른 이유이기도 하다.</a:t>
+              <a:t>행동 복제는 시연을 지도학습 데이터로 보고 log-likelihood를 키운다. 문제는 한 번 틀리면 시연자가 가 본 적 없는 상태에 들어가고, 거기서 더 틀린다는 것이다. 대책은 실행 분포에서 라벨을 다시 모으는 DAgger, multimodal 분포를 담는 표현력 큰 모델, 복구가 담긴 데이터다. Planner D의 시연은 Guidance + MPPI teacher가 만들어 복구 장면이 적다. 그림 (c)의 평균 문제는 Planner D가 가우시안이 아닌 flow matching을 고른 이유이기도 하다.</a:t>
             </a:r>
           </a:p>
         </p:txBody>
@@ -3414,7 +3414,7 @@
           <a:lstStyle/>
           <a:p>
             <a:r>
-              <a:t>둘째 장은 정책을 직접 고치는 방법이다. REINFORCE에서 시작해 기준선, 진화 전략, critic, 그리고 PPO까지 간다. 모두 같은 질문에 답한다. 표본이 적을 때 기울기의 분산을 어떻게 줄이고, 한 번에 얼마나 고쳐도 되는가. travplan의 두 학습, TP-0066과 TP-0128이 이 장에 기댄다.</a:t>
+              <a:t>둘째 장은 정책을 직접 고치는 방법이다. REINFORCE에서 시작해 기준선, 진화 전략, critic, 그리고 PPO까지 간다. 모두 같은 질문에 답한다. 샘플이 적을 때 기울기의 분산을 어떻게 줄이고, 한 번에 얼마나 고쳐도 되는가. travplan의 두 학습, TP-0066과 TP-0128이 이 장에 기댄다.</a:t>
             </a:r>
           </a:p>
         </p:txBody>
@@ -3484,7 +3484,7 @@
           <a:lstStyle/>
           <a:p>
             <a:r>
-              <a:t>로그 미분 요령을 쓰면 전이 확률이 기울기에서 사라져, 표본 궤적만 있으면 기울기를 낼 수 있다. 분산을 줄이는 요령은 둘이다. 시각 t 뒤의 보상만 곱하는 인과성과, 행동에 의존하지 않는 기준선을 빼는 것이다. 기준선을 빼도 기댓값은 그대로라는 점이 그림 (a)에서 보인다. 정책 기울기는 on-policy라서, 한 번 고친 뒤에는 표본을 다시 모아야 한다.</a:t>
+              <a:t>log-derivative trick을 쓰면 전이 확률이 기울기에서 사라져, 샘플 궤적만 있으면 기울기를 낼 수 있다. 분산을 줄이는 기법은 둘이다. 시각 t 뒤의 보상만 곱하는 인과성과, 행동에 의존하지 않는 기준선을 빼는 것이다. 기준선을 빼도 기댓값은 그대로라는 점이 그림 (a)에서 보인다. 정책 기울기는 on-policy라서, 한 번 고친 뒤에는 샘플을 다시 모아야 한다.</a:t>
             </a:r>
           </a:p>
         </p:txBody>
@@ -6593,7 +6593,7 @@
                 <a:ea typeface="Malgun Gothic"/>
                 <a:cs typeface="Malgun Gothic"/>
               </a:rPr>
-              <a:t>보상으로 다듬는다</a:t>
+              <a:t>보상으로 fine-tuning한다</a:t>
             </a:r>
           </a:p>
         </p:txBody>
@@ -6634,7 +6634,7 @@
                 <a:ea typeface="Malgun Gothic"/>
                 <a:cs typeface="Malgun Gothic"/>
               </a:rPr>
-              <a:t>버클리 CS 185/285의 순서로 본 강화학습과, travplan이 그것을 쓰는 세 자리</a:t>
+              <a:t>버클리 CS 185/285의 순서로 본 강화학습과, travplan이 강화학습을 쓰는 세 곳</a:t>
             </a:r>
           </a:p>
         </p:txBody>
@@ -7897,7 +7897,7 @@
                 <a:ea typeface="Malgun Gothic"/>
                 <a:cs typeface="Malgun Gothic"/>
               </a:rPr>
-              <a:t>비대칭 critic은 GT 지형 같은 특권 정보를 본다</a:t>
+              <a:t>비대칭 critic은 GT 지형 같은 privileged 정보를 본다</a:t>
             </a:r>
           </a:p>
         </p:txBody>
@@ -7968,7 +7968,7 @@
         <p:spPr>
           <a:xfrm>
             <a:off x="6223000" y="4092178"/>
-            <a:ext cx="5440934" cy="273050"/>
+            <a:ext cx="5440934" cy="495300"/>
           </a:xfrm>
           <a:prstGeom prst="rect">
             <a:avLst/>
@@ -7995,7 +7995,7 @@
                 <a:ea typeface="Malgun Gothic"/>
                 <a:cs typeface="Malgun Gothic"/>
               </a:rPr>
-              <a:t>21칸 무작위 보행에서 λ에 따른 이점 추정의 편향과 분산 — scripts/make_rl_figures.py</a:t>
+              <a:t>상태 21개의 random walk에서 λ에 따른 advantage 추정의 편향과 분산 — scripts/make_rl_figures.py</a:t>
             </a:r>
           </a:p>
         </p:txBody>
@@ -8008,7 +8008,7 @@
         </p:nvSpPr>
         <p:spPr>
           <a:xfrm>
-            <a:off x="711200" y="4447778"/>
+            <a:off x="711200" y="4625578"/>
             <a:ext cx="10769600" cy="502543"/>
           </a:xfrm>
           <a:prstGeom prst="roundRect">
@@ -8039,7 +8039,7 @@
         </p:nvSpPr>
         <p:spPr>
           <a:xfrm>
-            <a:off x="889000" y="4574778"/>
+            <a:off x="889000" y="4752578"/>
             <a:ext cx="10751820" cy="361479"/>
           </a:xfrm>
           <a:prstGeom prst="rect">
@@ -8283,7 +8283,7 @@
                 <a:ea typeface="Malgun Gothic"/>
                 <a:cs typeface="Malgun Gothic"/>
               </a:rPr>
-              <a:t>PPO는 비율을 잘라 한 번의 갱신 폭을 묶는다</a:t>
+              <a:t>PPO는 비율을 클리핑해 한 번의 갱신 폭을 제한한다</a:t>
             </a:r>
           </a:p>
         </p:txBody>
@@ -8467,7 +8467,7 @@
                 <a:ea typeface="Malgun Gothic"/>
                 <a:cs typeface="Malgun Gothic"/>
               </a:rPr>
-              <a:t>(a)(b) ε=0.2의 자른 목표 (c) 같은 KL 거리와 같은 파라미터 거리의 차이 — scripts/make_rl_figures.py</a:t>
+              <a:t>(a)(b) ε=0.2의 클리핑한 목표 (c) 같은 KL 거리와 같은 파라미터 거리의 차이 — scripts/make_rl_figures.py</a:t>
             </a:r>
           </a:p>
         </p:txBody>
@@ -8550,7 +8550,7 @@
                 <a:ea typeface="Malgun Gothic"/>
                 <a:cs typeface="Malgun Gothic"/>
               </a:rPr>
-              <a:t> flow 정책은 비율 ρ의 재료인 로그 확률을 바로 주지 않는다. 이것이 5장의 문제다.</a:t>
+              <a:t> flow 정책은 비율 ρ에 필요한 log-probability를 바로 주지 않는다. 이것이 5장의 문제다.</a:t>
             </a:r>
           </a:p>
         </p:txBody>
@@ -8755,7 +8755,7 @@
                 <a:ea typeface="Malgun Gothic"/>
                 <a:cs typeface="Malgun Gothic"/>
               </a:rPr>
-              <a:t>자료 밖 행동의 가치를</a:t>
+              <a:t>데이터 밖 행동의 가치를</a:t>
             </a:r>
           </a:p>
           <a:p>
@@ -8814,7 +8814,7 @@
                 <a:ea typeface="Malgun Gothic"/>
                 <a:cs typeface="Malgun Gothic"/>
               </a:rPr>
-              <a:t>max는 잡음을 과대평가하고, 오프라인에서는 그 오차를 바로잡을 새 자료가 없다.</a:t>
+              <a:t>max는 잡음을 과대평가하고, 오프라인에서는 그 오차를 바로잡을 새 데이터가 없다.</a:t>
             </a:r>
           </a:p>
         </p:txBody>
@@ -9106,7 +9106,7 @@
                 <a:ea typeface="Malgun Gothic"/>
                 <a:cs typeface="Malgun Gothic"/>
               </a:rPr>
-              <a:t>(a) 표 Q-learning 학습 곡선 (b) 수렴한 가치와 정책 (c) 참 Q가 모두 0일 때 max 목표와 Double Q의 치우침 — scripts/make_rl_figures.py</a:t>
+              <a:t>(a) tabular Q-learning 학습 곡선 (b) 수렴한 가치와 정책 (c) 참 Q가 모두 0일 때 max 목표와 Double Q의 편향 — scripts/make_rl_figures.py</a:t>
             </a:r>
           </a:p>
         </p:txBody>
@@ -9189,7 +9189,7 @@
                 <a:ea typeface="Malgun Gothic"/>
                 <a:cs typeface="Malgun Gothic"/>
               </a:rPr>
-              <a:t> MPPI 표본 768개 중 가장 낮은 비용도 잡음 때문에 실제보다 낮게 보인다.</a:t>
+              <a:t> MPPI 샘플 768개 중 가장 낮은 비용도 잡음 때문에 실제보다 낮게 보인다.</a:t>
             </a:r>
           </a:p>
         </p:txBody>
@@ -9394,7 +9394,7 @@
                 <a:ea typeface="Malgun Gothic"/>
                 <a:cs typeface="Malgun Gothic"/>
               </a:rPr>
-              <a:t>오프라인 RL은 자료 밖 행동을 과대평가하지 않게 막는다</a:t>
+              <a:t>오프라인 RL은 데이터 밖 행동을 과대평가하지 않게 막는다</a:t>
             </a:r>
           </a:p>
         </p:txBody>
@@ -9708,7 +9708,7 @@
                 <a:ea typeface="Malgun Gothic"/>
                 <a:cs typeface="Malgun Gothic"/>
               </a:rPr>
-              <a:t>자료에 있는 행동만, 좋았던 만큼 무게를 실어 따라 한다</a:t>
+              <a:t>데이터에 있는 행동만, 좋았던 만큼 가중해 따라 한다</a:t>
             </a:r>
           </a:p>
         </p:txBody>
@@ -10022,7 +10022,7 @@
                 <a:ea typeface="Malgun Gothic"/>
                 <a:cs typeface="Malgun Gothic"/>
               </a:rPr>
-              <a:t>Q를 배울 때 자료 밖 행동의 값을 벌점으로 끌어내린다</a:t>
+              <a:t>Q를 배울 때 데이터 밖 행동의 값을 페널티로 끌어내린다</a:t>
             </a:r>
           </a:p>
         </p:txBody>
@@ -10185,7 +10185,7 @@
         <p:spPr>
           <a:xfrm>
             <a:off x="927100" y="4012009"/>
-            <a:ext cx="917476" cy="241300"/>
+            <a:ext cx="1030784" cy="241300"/>
           </a:xfrm>
           <a:prstGeom prst="roundRect">
             <a:avLst>
@@ -10216,7 +10216,7 @@
         <p:spPr>
           <a:xfrm>
             <a:off x="1016000" y="4037409"/>
-            <a:ext cx="787266" cy="288925"/>
+            <a:ext cx="903973" cy="288925"/>
           </a:xfrm>
           <a:prstGeom prst="rect">
             <a:avLst/>
@@ -10243,7 +10243,7 @@
                 <a:ea typeface="Malgun Gothic"/>
                 <a:cs typeface="Malgun Gothic"/>
               </a:rPr>
-              <a:t>표본 안 기댓값</a:t>
+              <a:t>데이터 안 기댓값</a:t>
             </a:r>
           </a:p>
         </p:txBody>
@@ -10336,7 +10336,7 @@
                 <a:ea typeface="Malgun Gothic"/>
                 <a:cs typeface="Malgun Gothic"/>
               </a:rPr>
-              <a:t>자료 밖 행동은 묻지 않고, 자료 안 행동의 높은 쪽 값으로 배운다</a:t>
+              <a:t>데이터 밖 행동은 묻지 않고, 데이터 안 행동의 높은 쪽 값으로 배운다</a:t>
             </a:r>
           </a:p>
         </p:txBody>
@@ -10434,7 +10434,7 @@
                 <a:ea typeface="Malgun Gothic"/>
                 <a:cs typeface="Malgun Gothic"/>
               </a:rPr>
-              <a:t>회귀 Q는 자료 없는 a=−2.00을 고르고 참 보상은 0.00이다. 보수적 Q는 +0.15(참 0.99), AWR은 +0.12(참 0.98)를 고른다 — scripts/make_rl_figures.py</a:t>
+              <a:t>회귀 Q는 데이터 없는 a=−2.00을 고르고 참 보상은 0.00이다. 보수적 Q는 +0.15(참 0.99), AWR은 +0.12(참 0.98)를 고른다 — scripts/make_rl_figures.py</a:t>
             </a:r>
           </a:p>
         </p:txBody>
@@ -10517,7 +10517,7 @@
                 <a:ea typeface="Malgun Gothic"/>
                 <a:cs typeface="Malgun Gothic"/>
               </a:rPr>
-              <a:t> 벤치마크 기록에는 Guidance가 고른 경로의 결과만 있다. 기록만으로 배우면 이 문제가 바로 생긴다. 세 방법은 다음 네 장에서 하나씩 풀고 견준다.</a:t>
+              <a:t> 벤치마크 기록에는 Guidance가 고른 경로의 결과만 있다. 기록만으로 배우면 이 문제가 바로 생긴다. 세 방법은 다음 네 장에서 하나씩 살펴보고 비교한다.</a:t>
             </a:r>
           </a:p>
         </p:txBody>
@@ -10722,7 +10722,7 @@
                 <a:ea typeface="Malgun Gothic"/>
                 <a:cs typeface="Malgun Gothic"/>
               </a:rPr>
-              <a:t>AWR은 이점의 지수로 가중한 행동 복제다</a:t>
+              <a:t>AWR은 advantage의 지수로 가중한 행동 복제다</a:t>
             </a:r>
           </a:p>
         </p:txBody>
@@ -11070,7 +11070,7 @@
                 <a:ea typeface="Malgun Gothic"/>
                 <a:cs typeface="Malgun Gothic"/>
               </a:rPr>
-              <a:t>이점 +0.3, 0, −0.3, β = 0.15</a:t>
+              <a:t>advantage +0.3, 0, −0.3, β = 0.15</a:t>
             </a:r>
           </a:p>
         </p:txBody>
@@ -11601,7 +11601,7 @@
                 <a:ea typeface="Malgun Gothic"/>
                 <a:cs typeface="Malgun Gothic"/>
               </a:rPr>
-              <a:t> AWR은 자료에 없는 행동을 만들지 않는다. 안전하지만 시연 밖으로는 멀리 못 간다.</a:t>
+              <a:t> AWR은 데이터에 없는 행동을 만들지 않는다. 안전하지만 시연 밖으로는 멀리 못 간다.</a:t>
             </a:r>
           </a:p>
         </p:txBody>
@@ -11709,7 +11709,7 @@
                 <a:ea typeface="Malgun Gothic"/>
                 <a:cs typeface="Malgun Gothic"/>
               </a:rPr>
-              <a:t>CQL은 자료 밖 행동의 Q를 벌점으로 끌어내린다</a:t>
+              <a:t>CQL은 데이터 밖 행동의 Q를 페널티로 끌어내린다</a:t>
             </a:r>
           </a:p>
         </p:txBody>
@@ -11809,11 +11809,11 @@
         <p:spPr>
           <a:xfrm>
             <a:off x="711200" y="2197298"/>
-            <a:ext cx="5257800" cy="1876921"/>
+            <a:ext cx="5257800" cy="2097881"/>
           </a:xfrm>
           <a:prstGeom prst="roundRect">
             <a:avLst>
-              <a:gd name="adj" fmla="val 4059"/>
+              <a:gd name="adj" fmla="val 3632"/>
             </a:avLst>
           </a:prstGeom>
           <a:solidFill>
@@ -11869,7 +11869,7 @@
         <p:spPr>
           <a:xfrm>
             <a:off x="5962650" y="2197298"/>
-            <a:ext cx="6350" cy="1876921"/>
+            <a:ext cx="6350" cy="2097881"/>
           </a:xfrm>
           <a:prstGeom prst="rect">
             <a:avLst/>
@@ -11897,7 +11897,7 @@
         </p:nvSpPr>
         <p:spPr>
           <a:xfrm>
-            <a:off x="711200" y="4067870"/>
+            <a:off x="711200" y="4288830"/>
             <a:ext cx="5257800" cy="6350"/>
           </a:xfrm>
           <a:prstGeom prst="rect">
@@ -11927,7 +11927,7 @@
         <p:spPr>
           <a:xfrm>
             <a:off x="711200" y="2197298"/>
-            <a:ext cx="50800" cy="1876921"/>
+            <a:ext cx="50800" cy="2097881"/>
           </a:xfrm>
           <a:prstGeom prst="roundRect">
             <a:avLst>
@@ -12057,7 +12057,7 @@
                 <a:ea typeface="Malgun Gothic"/>
                 <a:cs typeface="Malgun Gothic"/>
               </a:rPr>
-              <a:t>모든 행동은 누르고, 자료 행동은 올린다</a:t>
+              <a:t>모든 행동은 누르고, 데이터 행동은 올린다</a:t>
             </a:r>
           </a:p>
         </p:txBody>
@@ -12109,7 +12109,7 @@
                 <a:ea typeface="Malgun Gothic"/>
                 <a:cs typeface="Malgun Gothic"/>
               </a:rPr>
-              <a:t>는 앞 장 Q-learning의 Bellman 오차 그대로다. 여기에 벌점 두 항을 더한다.</a:t>
+              <a:t>는 앞 장 Q-learning의 Bellman 오차 그대로다. 여기에 페널티 두 항을 더한다.</a:t>
             </a:r>
           </a:p>
         </p:txBody>
@@ -12123,7 +12123,7 @@
         <p:spPr>
           <a:xfrm>
             <a:off x="927100" y="3486249"/>
-            <a:ext cx="5041964" cy="603200"/>
+            <a:ext cx="5041964" cy="879401"/>
           </a:xfrm>
           <a:prstGeom prst="rect">
             <a:avLst/>
@@ -12150,7 +12150,7 @@
                 <a:ea typeface="Malgun Gothic"/>
                 <a:cs typeface="Malgun Gothic"/>
               </a:rPr>
-              <a:t>앞 항(soft max)은 Q가 큰 행동일수록 세게 누르고, 뒤 항은 자료에 있는 행동만 다시 올린다. 자료 안에서는 둘이 거의 상쇄되어 </a:t>
+              <a:t>앞 항(soft max)은 Q가 큰 행동일수록 세게 누르고, 뒤 항은 데이터에 있는 행동만 다시 올린다. 데이터 안에서는 둘이 거의 상쇄되어 </a:t>
             </a:r>
             <a:r>
               <a:rPr sz="1150" b="1" i="0">
@@ -12161,7 +12161,7 @@
                 <a:ea typeface="Malgun Gothic"/>
                 <a:cs typeface="Malgun Gothic"/>
               </a:rPr>
-              <a:t>자료 밖에서만 값이 내려간다.</a:t>
+              <a:t>데이터 밖에서만 값이 내려간다.</a:t>
             </a:r>
           </a:p>
         </p:txBody>
@@ -12423,7 +12423,7 @@
                 <a:ea typeface="Malgun Gothic"/>
                 <a:cs typeface="Malgun Gothic"/>
               </a:rPr>
-              <a:t>Q = 0.5, 0.8, 1.5 · 1.5인 a₃는 자료에 없다</a:t>
+              <a:t>Q = 0.5, 0.8, 1.5 · 1.5인 a₃는 데이터에 없다</a:t>
             </a:r>
           </a:p>
         </p:txBody>
@@ -12464,7 +12464,7 @@
                 <a:ea typeface="Malgun Gothic"/>
                 <a:cs typeface="Malgun Gothic"/>
               </a:rPr>
-              <a:t>앞 항의 기울기는 softmax라 0.20, 0.27, 0.54다. 자료가 a₁과 a₂를 반씩 담으면 뒤 항은 0.5, 0.5, 0이다.</a:t>
+              <a:t>앞 항의 기울기는 softmax라 0.20, 0.27, 0.54다. 데이터가 a₁과 a₂를 반씩 담으면 뒤 항은 0.5, 0.5, 0이다.</a:t>
             </a:r>
           </a:p>
         </p:txBody>
@@ -12505,7 +12505,7 @@
                 <a:ea typeface="Malgun Gothic"/>
                 <a:cs typeface="Malgun Gothic"/>
               </a:rPr>
-              <a:t>벌점만 보면 Q가 움직이는 방향은 </a:t>
+              <a:t>페널티만 보면 Q가 움직이는 방향은 </a:t>
             </a:r>
             <a:r>
               <a:rPr sz="1150" b="1" i="0">
@@ -12540,7 +12540,7 @@
         </p:nvSpPr>
         <p:spPr>
           <a:xfrm>
-            <a:off x="711200" y="4252020"/>
+            <a:off x="711200" y="4472980"/>
             <a:ext cx="10769600" cy="751086"/>
           </a:xfrm>
           <a:prstGeom prst="roundRect">
@@ -12571,7 +12571,7 @@
         </p:nvSpPr>
         <p:spPr>
           <a:xfrm>
-            <a:off x="889000" y="4379020"/>
+            <a:off x="889000" y="4599980"/>
             <a:ext cx="10751820" cy="672157"/>
           </a:xfrm>
           <a:prstGeom prst="rect">
@@ -12815,7 +12815,7 @@
                 <a:ea typeface="Malgun Gothic"/>
                 <a:cs typeface="Malgun Gothic"/>
               </a:rPr>
-              <a:t>IQL은 자료 밖 행동을 한 번도 묻지 않고 가치를 배운다</a:t>
+              <a:t>IQL은 데이터 밖 행동을 한 번도 묻지 않고 가치를 배운다</a:t>
             </a:r>
           </a:p>
         </p:txBody>
@@ -13228,7 +13228,7 @@
                 <a:ea typeface="Malgun Gothic"/>
                 <a:cs typeface="Malgun Gothic"/>
               </a:rPr>
-              <a:t>① V는 자료 안 행동들의 Q 중 높은 쪽(expectile τ)을 맞춘다. Q가 V보다 크면 τ, 작으면 1 − τ로 오차를 센다.</a:t>
+              <a:t>① V는 데이터 안 행동들의 Q 중 높은 쪽(expectile τ)을 맞춘다. Q가 V보다 크면 τ, 작으면 1 − τ로 오차를 센다.</a:t>
             </a:r>
           </a:p>
         </p:txBody>
@@ -13269,7 +13269,7 @@
                 <a:ea typeface="Malgun Gothic"/>
                 <a:cs typeface="Malgun Gothic"/>
               </a:rPr>
-              <a:t>② Q의 목표는 r + γV(s′)다. max가 없으니 자료 밖 행동을 묻지 않는다.</a:t>
+              <a:t>② Q의 목표는 r + γV(s′)다. max가 없으니 데이터 밖 행동을 묻지 않는다.</a:t>
             </a:r>
           </a:p>
         </p:txBody>
@@ -13572,7 +13572,7 @@
                 <a:ea typeface="Malgun Gothic"/>
                 <a:cs typeface="Malgun Gothic"/>
               </a:rPr>
-              <a:t>자료 행동의 Q = 0.2, 0.5, 0.9</a:t>
+              <a:t>데이터 행동의 Q = 0.2, 0.5, 0.9</a:t>
             </a:r>
           </a:p>
         </p:txBody>
@@ -13654,7 +13654,7 @@
                 <a:ea typeface="Malgun Gothic"/>
                 <a:cs typeface="Malgun Gothic"/>
               </a:rPr>
-              <a:t>τ를 1로 올릴수록 자료 안의 최댓값 0.9에 다가간다. </a:t>
+              <a:t>τ를 1로 올릴수록 데이터 안의 최댓값 0.9에 다가간다. </a:t>
             </a:r>
             <a:r>
               <a:rPr sz="1150" b="1" i="0">
@@ -13665,7 +13665,7 @@
                 <a:ea typeface="Malgun Gothic"/>
                 <a:cs typeface="Malgun Gothic"/>
               </a:rPr>
-              <a:t>자료 밖의 더 큰 값은 처음부터 계산에 없다.</a:t>
+              <a:t>데이터 밖의 더 큰 값은 처음부터 계산에 없다.</a:t>
             </a:r>
           </a:p>
         </p:txBody>
@@ -13953,7 +13953,7 @@
                 <a:ea typeface="Malgun Gothic"/>
                 <a:cs typeface="Malgun Gothic"/>
               </a:rPr>
-              <a:t>자료 밖 행동을 AWR은 피하고, CQL은 깎고, IQL은 묻지 않는다</a:t>
+              <a:t>데이터 밖 행동을 AWR은 피하고, CQL은 깎고, IQL은 묻지 않는다</a:t>
             </a:r>
           </a:p>
         </p:txBody>
@@ -13968,7 +13968,7 @@
         </p:nvGraphicFramePr>
         <p:xfrm>
           <a:off x="711200" y="1361678"/>
-          <a:ext cx="10769599" cy="1552119"/>
+          <a:ext cx="10769600" cy="1741538"/>
         </p:xfrm>
         <a:graphic>
           <a:graphicData uri="http://schemas.openxmlformats.org/drawingml/2006/table">
@@ -13978,10 +13978,10 @@
               </a:tblPr>
               <a:tblGrid>
                 <a:gridCol w="535781"/>
-                <a:gridCol w="2801243"/>
-                <a:gridCol w="1486495"/>
-                <a:gridCol w="1900535"/>
-                <a:gridCol w="4045545"/>
+                <a:gridCol w="3057823"/>
+                <a:gridCol w="1877516"/>
+                <a:gridCol w="1741785"/>
+                <a:gridCol w="3556695"/>
               </a:tblGrid>
               <a:tr h="300067">
                 <a:tc>
@@ -14022,7 +14022,7 @@
                           <a:ea typeface="Malgun Gothic"/>
                           <a:cs typeface="Malgun Gothic"/>
                         </a:rPr>
-                        <a:t>자료 밖 행동을 다루는 법</a:t>
+                        <a:t>데이터 밖 행동을 다루는 법</a:t>
                       </a:r>
                     </a:p>
                   </a:txBody>
@@ -14070,7 +14070,7 @@
                           <a:ea typeface="Malgun Gothic"/>
                           <a:cs typeface="Malgun Gothic"/>
                         </a:rPr>
-                        <a:t>손잡이</a:t>
+                        <a:t>하이퍼파라미터</a:t>
                       </a:r>
                     </a:p>
                   </a:txBody>
@@ -14144,7 +14144,7 @@
                           <a:ea typeface="Malgun Gothic"/>
                           <a:cs typeface="Malgun Gothic"/>
                         </a:rPr>
-                        <a:t>정책이 자료의 행동만 이점으로 가중해 따라 한다</a:t>
+                        <a:t>정책이 데이터의 행동만 advantage로 가중해 따라 한다</a:t>
                       </a:r>
                     </a:p>
                   </a:txBody>
@@ -14168,7 +14168,7 @@
                           <a:ea typeface="Malgun Gothic"/>
                           <a:cs typeface="Malgun Gothic"/>
                         </a:rPr>
-                        <a:t>V(이점 A를 위해), 정책</a:t>
+                        <a:t>V(advantage A를 위해), 정책</a:t>
                       </a:r>
                     </a:p>
                   </a:txBody>
@@ -14216,7 +14216,7 @@
                           <a:ea typeface="Malgun Gothic"/>
                           <a:cs typeface="Malgun Gothic"/>
                         </a:rPr>
-                        <a:t>자료보다 멀리 가지 못한다</a:t>
+                        <a:t>데이터보다 멀리 가지 못한다</a:t>
                       </a:r>
                     </a:p>
                   </a:txBody>
@@ -14266,7 +14266,7 @@
                           <a:ea typeface="Malgun Gothic"/>
                           <a:cs typeface="Malgun Gothic"/>
                         </a:rPr>
-                        <a:t>Q 학습에 벌점을 더해 자료 밖 값을 깎는다</a:t>
+                        <a:t>Q 학습에 페널티를 더해 데이터 밖 값을 깎는다</a:t>
                       </a:r>
                     </a:p>
                   </a:txBody>
@@ -14314,7 +14314,7 @@
                           <a:ea typeface="Malgun Gothic"/>
                           <a:cs typeface="Malgun Gothic"/>
                         </a:rPr>
-                        <a:t>α: 벌점 세기</a:t>
+                        <a:t>α: 페널티 세기</a:t>
                       </a:r>
                     </a:p>
                   </a:txBody>
@@ -14338,7 +14338,7 @@
                           <a:ea typeface="Malgun Gothic"/>
                           <a:cs typeface="Malgun Gothic"/>
                         </a:rPr>
-                        <a:t>α가 크면 좋은 새 행동도 깎인다. 연속 행동은 앞 항을 표본으로 근사한다</a:t>
+                        <a:t>α가 크면 좋은 새 행동도 깎인다. 연속 행동은 앞 항을 샘플로 근사한다</a:t>
                       </a:r>
                     </a:p>
                   </a:txBody>
@@ -14349,7 +14349,7 @@
                   </a:tcPr>
                 </a:tc>
               </a:tr>
-              <a:tr h="289272">
+              <a:tr h="478691">
                 <a:tc>
                   <a:txBody>
                     <a:bodyPr wrap="square"/>
@@ -14388,7 +14388,7 @@
                           <a:ea typeface="Malgun Gothic"/>
                           <a:cs typeface="Malgun Gothic"/>
                         </a:rPr>
-                        <a:t>Q와 V를 자료 안 행동만으로 배운다</a:t>
+                        <a:t>Q와 V를 데이터 안 행동만으로 배운다</a:t>
                       </a:r>
                     </a:p>
                   </a:txBody>
@@ -14460,7 +14460,7 @@
                           <a:ea typeface="Malgun Gothic"/>
                           <a:cs typeface="Malgun Gothic"/>
                         </a:rPr>
-                        <a:t>자료에 없는 행동은 끝까지 고르지 못한다</a:t>
+                        <a:t>데이터에 없는 행동은 끝까지 고르지 못한다</a:t>
                       </a:r>
                     </a:p>
                   </a:txBody>
@@ -14483,7 +14483,7 @@
         </p:nvSpPr>
         <p:spPr>
           <a:xfrm>
-            <a:off x="711200" y="3365500"/>
+            <a:off x="711200" y="3588345"/>
             <a:ext cx="10769600" cy="830560"/>
           </a:xfrm>
           <a:prstGeom prst="roundRect">
@@ -14514,7 +14514,7 @@
         </p:nvSpPr>
         <p:spPr>
           <a:xfrm>
-            <a:off x="711200" y="3365500"/>
+            <a:off x="711200" y="3588345"/>
             <a:ext cx="10769600" cy="6350"/>
           </a:xfrm>
           <a:prstGeom prst="rect">
@@ -14543,7 +14543,7 @@
         </p:nvSpPr>
         <p:spPr>
           <a:xfrm>
-            <a:off x="11474450" y="3365500"/>
+            <a:off x="11474450" y="3588345"/>
             <a:ext cx="6350" cy="830560"/>
           </a:xfrm>
           <a:prstGeom prst="rect">
@@ -14572,7 +14572,7 @@
         </p:nvSpPr>
         <p:spPr>
           <a:xfrm>
-            <a:off x="711200" y="4189710"/>
+            <a:off x="711200" y="4412555"/>
             <a:ext cx="10769600" cy="6350"/>
           </a:xfrm>
           <a:prstGeom prst="rect">
@@ -14601,7 +14601,7 @@
         </p:nvSpPr>
         <p:spPr>
           <a:xfrm>
-            <a:off x="711200" y="3365500"/>
+            <a:off x="711200" y="3588345"/>
             <a:ext cx="50800" cy="830560"/>
           </a:xfrm>
           <a:prstGeom prst="roundRect">
@@ -14632,7 +14632,7 @@
         </p:nvSpPr>
         <p:spPr>
           <a:xfrm>
-            <a:off x="927100" y="3511550"/>
+            <a:off x="927100" y="3734395"/>
             <a:ext cx="404416" cy="241300"/>
           </a:xfrm>
           <a:prstGeom prst="roundRect">
@@ -14663,7 +14663,7 @@
         </p:nvSpPr>
         <p:spPr>
           <a:xfrm>
-            <a:off x="1016000" y="3536950"/>
+            <a:off x="1016000" y="3759795"/>
             <a:ext cx="258814" cy="288925"/>
           </a:xfrm>
           <a:prstGeom prst="rect">
@@ -14704,7 +14704,7 @@
         </p:nvSpPr>
         <p:spPr>
           <a:xfrm>
-            <a:off x="927100" y="3829050"/>
+            <a:off x="927100" y="4051895"/>
             <a:ext cx="10719118" cy="327000"/>
           </a:xfrm>
           <a:prstGeom prst="rect">
@@ -14745,7 +14745,7 @@
         </p:nvSpPr>
         <p:spPr>
           <a:xfrm>
-            <a:off x="711200" y="4373860"/>
+            <a:off x="711200" y="4596705"/>
             <a:ext cx="10769600" cy="751086"/>
           </a:xfrm>
           <a:prstGeom prst="roundRect">
@@ -14776,7 +14776,7 @@
         </p:nvSpPr>
         <p:spPr>
           <a:xfrm>
-            <a:off x="889000" y="4500860"/>
+            <a:off x="889000" y="4723705"/>
             <a:ext cx="10751820" cy="672157"/>
           </a:xfrm>
           <a:prstGeom prst="rect">
@@ -14815,7 +14815,7 @@
                 <a:ea typeface="Malgun Gothic"/>
                 <a:cs typeface="Malgun Gothic"/>
               </a:rPr>
-              <a:t> TP-0066은 AWR 쪽이다. results/ 기록만으로 배우는 순수 오프라인(다음 후보 4)은 IQL식으로 시작해, 자료 정책보다 나아지는지부터 작게 잰다.</a:t>
+              <a:t> TP-0066은 AWR 쪽이다. results/ 기록만으로 배우는 순수 오프라인(다음 후보 4)은 IQL식으로 시작해, 데이터를 모은 정책보다 나아지는지부터 작게 잰다.</a:t>
             </a:r>
           </a:p>
         </p:txBody>
@@ -14923,7 +14923,7 @@
                 <a:ea typeface="Malgun Gothic"/>
                 <a:cs typeface="Malgun Gothic"/>
               </a:rPr>
-              <a:t>강의를 다섯 갈래로 묶고 travplan으로 돌아온다</a:t>
+              <a:t>강의를 다섯 갈래로 나누고 travplan으로 돌아온다</a:t>
             </a:r>
           </a:p>
         </p:txBody>
@@ -15861,7 +15861,7 @@
                 <a:ea typeface="Malgun Gothic"/>
                 <a:cs typeface="Malgun Gothic"/>
               </a:rPr>
-              <a:t>표본 판이다</a:t>
+              <a:t>샘플링 버전이다</a:t>
             </a:r>
           </a:p>
         </p:txBody>
@@ -16821,7 +16821,7 @@
                 <a:ea typeface="Malgun Gothic"/>
                 <a:cs typeface="Malgun Gothic"/>
               </a:rPr>
-              <a:t>에서 표본 </a:t>
+              <a:t>에서 샘플 </a:t>
             </a:r>
             <a:r>
               <a:rPr sz="1150" b="0" i="1">
@@ -17153,7 +17153,7 @@
                 <a:ea typeface="Malgun Gothic"/>
                 <a:cs typeface="Malgun Gothic"/>
               </a:rPr>
-              <a:t>온도는 표본 몇 개 분량의 정보를 쓸지 정한다</a:t>
+              <a:t>온도는 샘플 몇 개 분량의 정보를 쓸지 정한다</a:t>
             </a:r>
           </a:p>
         </p:txBody>
@@ -17251,7 +17251,7 @@
                 <a:ea typeface="Malgun Gothic"/>
                 <a:cs typeface="Malgun Gothic"/>
               </a:rPr>
-              <a:t>넓고 얕은 골짜기, 좁고 깊은 골짜기, 가운데 언덕(치명 셀 같은 곳). 같은 표본 64개를 세 온도로 가중했다 — scripts/make_rl_figures.py</a:t>
+              <a:t>넓고 얕은 골짜기, 좁고 깊은 골짜기, 가운데 언덕(치명 셀 같은 곳). 같은 샘플 64개를 세 온도로 가중했다 — scripts/make_rl_figures.py</a:t>
             </a:r>
           </a:p>
         </p:txBody>
@@ -17482,7 +17482,7 @@
                 <a:ea typeface="Malgun Gothic"/>
                 <a:cs typeface="Malgun Gothic"/>
               </a:rPr>
-              <a:t>표본 1.6개 분량. 가장 좋은 표본 하나에 몰린다(탐욕).</a:t>
+              <a:t>샘플 1.6개 분량. 가장 좋은 샘플 하나에 몰린다(greedy).</a:t>
             </a:r>
           </a:p>
         </p:txBody>
@@ -17713,7 +17713,7 @@
                 <a:ea typeface="Malgun Gothic"/>
                 <a:cs typeface="Malgun Gothic"/>
               </a:rPr>
-              <a:t>표본 59.4개 분량. 평균에 가까워진다.</a:t>
+              <a:t>샘플 59.4개 분량. 평균에 가까워진다.</a:t>
             </a:r>
           </a:p>
         </p:txBody>
@@ -18002,7 +18002,7 @@
                 <a:ea typeface="Malgun Gothic"/>
                 <a:cs typeface="Malgun Gothic"/>
               </a:rPr>
-              <a:t>(b) 모델 하나는 자료 밖 a=−2.50을 골라 실제로 −2.06이 되고, 앙상블 평균−2σ는 a=+0.71로 참 최적과 같은 +0.28을 낸다 — scripts/make_rl_figures.py</a:t>
+              <a:t>(b) 모델 하나는 데이터 밖 a=−2.50을 골라 실제로 −2.06이 되고, 앙상블 평균−2σ는 a=+0.71로 참 최적과 같은 +0.28을 낸다 — scripts/make_rl_figures.py</a:t>
             </a:r>
           </a:p>
         </p:txBody>
@@ -18016,11 +18016,11 @@
         <p:spPr>
           <a:xfrm>
             <a:off x="711200" y="4193778"/>
-            <a:ext cx="3488234" cy="820341"/>
+            <a:ext cx="3488234" cy="1041301"/>
           </a:xfrm>
           <a:prstGeom prst="roundRect">
             <a:avLst>
-              <a:gd name="adj" fmla="val 9288"/>
+              <a:gd name="adj" fmla="val 7317"/>
             </a:avLst>
           </a:prstGeom>
           <a:solidFill>
@@ -18076,7 +18076,7 @@
         <p:spPr>
           <a:xfrm>
             <a:off x="4193084" y="4193778"/>
-            <a:ext cx="6350" cy="820341"/>
+            <a:ext cx="6350" cy="1041301"/>
           </a:xfrm>
           <a:prstGeom prst="rect">
             <a:avLst/>
@@ -18104,7 +18104,7 @@
         </p:nvSpPr>
         <p:spPr>
           <a:xfrm>
-            <a:off x="711200" y="5007769"/>
+            <a:off x="711200" y="5228729"/>
             <a:ext cx="3488234" cy="6350"/>
           </a:xfrm>
           <a:prstGeom prst="rect">
@@ -18134,7 +18134,7 @@
         <p:spPr>
           <a:xfrm>
             <a:off x="711200" y="4193778"/>
-            <a:ext cx="50800" cy="820341"/>
+            <a:ext cx="50800" cy="1041301"/>
           </a:xfrm>
           <a:prstGeom prst="roundRect">
             <a:avLst>
@@ -18247,11 +18247,11 @@
         <p:spPr>
           <a:xfrm>
             <a:off x="4351834" y="4193778"/>
-            <a:ext cx="3488234" cy="820341"/>
+            <a:ext cx="3488234" cy="1041301"/>
           </a:xfrm>
           <a:prstGeom prst="roundRect">
             <a:avLst>
-              <a:gd name="adj" fmla="val 9288"/>
+              <a:gd name="adj" fmla="val 7317"/>
             </a:avLst>
           </a:prstGeom>
           <a:solidFill>
@@ -18307,7 +18307,7 @@
         <p:spPr>
           <a:xfrm>
             <a:off x="7833717" y="4193778"/>
-            <a:ext cx="6350" cy="820341"/>
+            <a:ext cx="6350" cy="1041301"/>
           </a:xfrm>
           <a:prstGeom prst="rect">
             <a:avLst/>
@@ -18335,7 +18335,7 @@
         </p:nvSpPr>
         <p:spPr>
           <a:xfrm>
-            <a:off x="4351834" y="5007769"/>
+            <a:off x="4351834" y="5228729"/>
             <a:ext cx="3488234" cy="6350"/>
           </a:xfrm>
           <a:prstGeom prst="rect">
@@ -18365,7 +18365,7 @@
         <p:spPr>
           <a:xfrm>
             <a:off x="4351834" y="4193778"/>
-            <a:ext cx="50800" cy="820341"/>
+            <a:ext cx="50800" cy="1041301"/>
           </a:xfrm>
           <a:prstGeom prst="roundRect">
             <a:avLst>
@@ -18464,7 +18464,7 @@
                 <a:ea typeface="Malgun Gothic"/>
                 <a:cs typeface="Malgun Gothic"/>
               </a:rPr>
-              <a:t>실제 상태에서 몇 스텝만 굴린다(MBPO)</a:t>
+              <a:t>실제 상태에서 몇 스텝만 rollout한다(MBPO)</a:t>
             </a:r>
           </a:p>
         </p:txBody>
@@ -18478,11 +18478,11 @@
         <p:spPr>
           <a:xfrm>
             <a:off x="7992467" y="4193778"/>
-            <a:ext cx="3488234" cy="820341"/>
+            <a:ext cx="3488234" cy="1041301"/>
           </a:xfrm>
           <a:prstGeom prst="roundRect">
             <a:avLst>
-              <a:gd name="adj" fmla="val 9288"/>
+              <a:gd name="adj" fmla="val 7317"/>
             </a:avLst>
           </a:prstGeom>
           <a:solidFill>
@@ -18538,7 +18538,7 @@
         <p:spPr>
           <a:xfrm>
             <a:off x="11474351" y="4193778"/>
-            <a:ext cx="6350" cy="820341"/>
+            <a:ext cx="6350" cy="1041301"/>
           </a:xfrm>
           <a:prstGeom prst="rect">
             <a:avLst/>
@@ -18566,7 +18566,7 @@
         </p:nvSpPr>
         <p:spPr>
           <a:xfrm>
-            <a:off x="7992467" y="5007769"/>
+            <a:off x="7992467" y="5228729"/>
             <a:ext cx="3488234" cy="6350"/>
           </a:xfrm>
           <a:prstGeom prst="rect">
@@ -18596,7 +18596,7 @@
         <p:spPr>
           <a:xfrm>
             <a:off x="7992467" y="4193778"/>
-            <a:ext cx="50800" cy="820341"/>
+            <a:ext cx="50800" cy="1041301"/>
           </a:xfrm>
           <a:prstGeom prst="roundRect">
             <a:avLst>
@@ -18654,7 +18654,7 @@
                 <a:ea typeface="Malgun Gothic"/>
                 <a:cs typeface="Malgun Gothic"/>
               </a:rPr>
-              <a:t>잠재 공간</a:t>
+              <a:t>latent 공간</a:t>
             </a:r>
           </a:p>
         </p:txBody>
@@ -18668,7 +18668,7 @@
         <p:spPr>
           <a:xfrm>
             <a:off x="8208367" y="4647109"/>
-            <a:ext cx="3219310" cy="327000"/>
+            <a:ext cx="3219310" cy="603200"/>
           </a:xfrm>
           <a:prstGeom prst="rect">
             <a:avLst/>
@@ -18695,7 +18695,7 @@
                 <a:ea typeface="Malgun Gothic"/>
                 <a:cs typeface="Malgun Gothic"/>
               </a:rPr>
-              <a:t>잠재 상태에서 굴린다(Dreamer, TD-MPC2)</a:t>
+              <a:t>latent 상태에서 rollout한다(Dreamer, TD-MPC2)</a:t>
             </a:r>
           </a:p>
         </p:txBody>
@@ -18708,7 +18708,7 @@
         </p:nvSpPr>
         <p:spPr>
           <a:xfrm>
-            <a:off x="711200" y="5191919"/>
+            <a:off x="711200" y="5412879"/>
             <a:ext cx="10769600" cy="502543"/>
           </a:xfrm>
           <a:prstGeom prst="roundRect">
@@ -18739,7 +18739,7 @@
         </p:nvSpPr>
         <p:spPr>
           <a:xfrm>
-            <a:off x="889000" y="5318919"/>
+            <a:off x="889000" y="5539879"/>
             <a:ext cx="10751820" cy="361479"/>
           </a:xfrm>
           <a:prstGeom prst="rect">
@@ -19690,7 +19690,7 @@
                 <a:ea typeface="Malgun Gothic"/>
                 <a:cs typeface="Malgun Gothic"/>
               </a:rPr>
-              <a:t>로그 확률 없이 강화학습에 넣는 법과, 안전을 보상에 섞지 않는 법을 본다.</a:t>
+              <a:t>log-probability 없이 강화학습에 넣는 법과, 안전을 보상에 섞지 않는 법을 다룬다.</a:t>
             </a:r>
           </a:p>
         </p:txBody>
@@ -20068,7 +20068,7 @@
                 <a:ea typeface="Malgun Gothic"/>
                 <a:cs typeface="Malgun Gothic"/>
               </a:rPr>
-              <a:t>(b) 응답 8개 중 3개가 정답 검사를 통과하면 통과는 +1.29, 실패는 −0.77의 이점을 받는다 — scripts/make_rl_figures.py</a:t>
+              <a:t>(b) 응답 8개 중 3개가 정답 검사를 통과하면 통과는 +1.29, 실패는 −0.77의 advantage를 받는다 — scripts/make_rl_figures.py</a:t>
             </a:r>
           </a:p>
         </p:txBody>
@@ -20315,7 +20315,7 @@
                 <a:ea typeface="Malgun Gothic"/>
                 <a:cs typeface="Malgun Gothic"/>
               </a:rPr>
-              <a:t>R.13 · 확산·flow 정책의 RL</a:t>
+              <a:t>R.13 · diffusion·flow 정책의 RL</a:t>
             </a:r>
           </a:p>
         </p:txBody>
@@ -20356,7 +20356,7 @@
                 <a:ea typeface="Malgun Gothic"/>
                 <a:cs typeface="Malgun Gothic"/>
               </a:rPr>
-              <a:t>flow 정책의 RL은 로그 확률을 우회하는 법으로 갈린다</a:t>
+              <a:t>flow 정책의 RL은 log-probability를 우회하는 법으로 갈린다</a:t>
             </a:r>
           </a:p>
         </p:txBody>
@@ -20380,10 +20380,10 @@
                 <a:tableStyleId>{5C22544A-7EE6-4342-B048-85BDC9FD1C3A}</a:tableStyleId>
               </a:tblPr>
               <a:tblGrid>
-                <a:gridCol w="983258"/>
-                <a:gridCol w="2147094"/>
-                <a:gridCol w="5827216"/>
-                <a:gridCol w="1812032"/>
+                <a:gridCol w="983059"/>
+                <a:gridCol w="2144514"/>
+                <a:gridCol w="5830689"/>
+                <a:gridCol w="1811338"/>
               </a:tblGrid>
               <a:tr h="314657">
                 <a:tc>
@@ -20448,7 +20448,7 @@
                           <a:ea typeface="Malgun Gothic"/>
                           <a:cs typeface="Malgun Gothic"/>
                         </a:rPr>
-                        <a:t>로그 확률 문제를 푸는 법</a:t>
+                        <a:t>log-probability 문제를 푸는 법</a:t>
                       </a:r>
                     </a:p>
                   </a:txBody>
@@ -20644,7 +20644,7 @@
                           <a:ea typeface="Malgun Gothic"/>
                           <a:cs typeface="Malgun Gothic"/>
                         </a:rPr>
-                        <a:t>가능도 비율 대신 조건부 flow matching 손실의 차이를 비율로 쓴다</a:t>
+                        <a:t>likelihood 비율 대신 조건부 flow matching 손실의 차이를 비율로 쓴다</a:t>
                       </a:r>
                     </a:p>
                   </a:txBody>
@@ -20668,7 +20668,7 @@
                           <a:ea typeface="Malgun Gothic"/>
                           <a:cs typeface="Malgun Gothic"/>
                         </a:rPr>
-                        <a:t>PPO 자른 목표</a:t>
+                        <a:t>PPO 클리핑 목표</a:t>
                       </a:r>
                     </a:p>
                   </a:txBody>
@@ -20840,7 +20840,7 @@
                           <a:ea typeface="Malgun Gothic"/>
                           <a:cs typeface="Malgun Gothic"/>
                         </a:rPr>
-                        <a:t>비율을 표본마다 자르고 음의 이점에는 비대칭 신뢰 영역을 쓴다</a:t>
+                        <a:t>비율을 샘플마다 클리핑하고 음의 advantage에는 비대칭 trust region을 쓴다</a:t>
                       </a:r>
                     </a:p>
                   </a:txBody>
@@ -20938,7 +20938,7 @@
                           <a:ea typeface="Malgun Gothic"/>
                           <a:cs typeface="Malgun Gothic"/>
                         </a:rPr>
-                        <a:t>critic의 행동 기울기를 replay 행동 가까운 차원에만 흘린다</a:t>
+                        <a:t>critic의 행동 기울기를 replay 행동 가까운 차원에만 전달한다</a:t>
                       </a:r>
                     </a:p>
                   </a:txBody>
@@ -21036,7 +21036,7 @@
                           <a:ea typeface="Malgun Gothic"/>
                           <a:cs typeface="Malgun Gothic"/>
                         </a:rPr>
-                        <a:t>정책의 점수를 critic의 행동 기울기에 맞춘다</a:t>
+                        <a:t>정책의 score를 critic의 행동 기울기에 맞춘다</a:t>
                       </a:r>
                     </a:p>
                   </a:txBody>
@@ -21720,7 +21720,7 @@
                 <a:ea typeface="Malgun Gothic"/>
                 <a:cs typeface="Malgun Gothic"/>
               </a:rPr>
-              <a:t>비율을 표본마다 만들어 따로 자른다</a:t>
+              <a:t>비율을 샘플마다 만들어 따로 클리핑한다</a:t>
             </a:r>
           </a:p>
         </p:txBody>
@@ -21763,7 +21763,7 @@
                 <a:ea typeface="Malgun Gothic"/>
                 <a:cs typeface="Malgun Gothic"/>
               </a:rPr>
-              <a:t>음의 이점에는 SPO의 이차 벌점(ASPO)</a:t>
+              <a:t>음의 advantage에는 SPO의 이차 페널티(ASPO)</a:t>
             </a:r>
           </a:p>
         </p:txBody>
@@ -22070,7 +22070,7 @@
                 <a:ea typeface="Malgun Gothic"/>
                 <a:cs typeface="Malgun Gothic"/>
               </a:rPr>
-              <a:t>조작 미세조정에서는 ASPO를 껐다 → 끈 판과 켠 판을 함께 잰다</a:t>
+              <a:t>조작 fine-tuning에서는 ASPO를 껐다 → 끈 설정과 켠 설정을 함께 잰다</a:t>
             </a:r>
           </a:p>
         </p:txBody>
@@ -22578,7 +22578,7 @@
                 <a:ea typeface="Malgun Gothic"/>
                 <a:cs typeface="Malgun Gothic"/>
               </a:rPr>
-              <a:t>HJ 도달 가능성 critic으로 점수 목표를 안전 집합 안과 밖으로 나눈다.</a:t>
+              <a:t>HJ reachability critic으로 score 목표를 안전 집합 안과 밖으로 나눈다.</a:t>
             </a:r>
           </a:p>
         </p:txBody>
@@ -22922,7 +22922,7 @@
                 <a:ea typeface="Malgun Gothic"/>
                 <a:cs typeface="Malgun Gothic"/>
               </a:rPr>
-              <a:t>무작위화 시뮬 n개의 다음 상태 분산을 안전 비용에 더한다.</a:t>
+              <a:t>랜덤화 시뮬 n개의 다음 상태 분산을 안전 비용에 더한다.</a:t>
             </a:r>
           </a:p>
         </p:txBody>
@@ -22963,7 +22963,7 @@
                 <a:ea typeface="Malgun Gothic"/>
                 <a:cs typeface="Malgun Gothic"/>
               </a:rPr>
-              <a:t>plant 변형 여럿으로 후보 점수를 굴린다.</a:t>
+              <a:t>plant 변형 여럿으로 후보 점수를 rollout한다.</a:t>
             </a:r>
           </a:p>
         </p:txBody>
@@ -23307,7 +23307,7 @@
                 <a:ea typeface="Malgun Gothic"/>
                 <a:cs typeface="Malgun Gothic"/>
               </a:rPr>
-              <a:t>그룹 이점을 하위 분위로 잡는다.</a:t>
+              <a:t>그룹 advantage를 하위 분위수로 잡는다.</a:t>
             </a:r>
           </a:p>
         </p:txBody>
@@ -23693,7 +23693,7 @@
                 <a:ea typeface="Malgun Gothic"/>
                 <a:cs typeface="Malgun Gothic"/>
               </a:rPr>
-              <a:t>travplan은 이미 세 자리에서 강화학습을 쓴다</a:t>
+              <a:t>travplan은 이미 세 곳에서 강화학습을 쓴다</a:t>
             </a:r>
           </a:p>
         </p:txBody>
@@ -23708,7 +23708,7 @@
         </p:nvGraphicFramePr>
         <p:xfrm>
           <a:off x="711200" y="1361678"/>
-          <a:ext cx="10769600" cy="1946220"/>
+          <a:ext cx="10769599" cy="1946220"/>
         </p:xfrm>
         <a:graphic>
           <a:graphicData uri="http://schemas.openxmlformats.org/drawingml/2006/table">
@@ -23717,10 +23717,10 @@
                 <a:tableStyleId>{5C22544A-7EE6-4342-B048-85BDC9FD1C3A}</a:tableStyleId>
               </a:tblPr>
               <a:tblGrid>
-                <a:gridCol w="2024955"/>
-                <a:gridCol w="4344690"/>
-                <a:gridCol w="933252"/>
-                <a:gridCol w="3466703"/>
+                <a:gridCol w="1967607"/>
+                <a:gridCol w="4539952"/>
+                <a:gridCol w="913209"/>
+                <a:gridCol w="3348831"/>
               </a:tblGrid>
               <a:tr h="314657">
                 <a:tc>
@@ -23737,7 +23737,7 @@
                           <a:ea typeface="Malgun Gothic"/>
                           <a:cs typeface="Malgun Gothic"/>
                         </a:rPr>
-                        <a:t>자리</a:t>
+                        <a:t>쓰는 곳</a:t>
                       </a:r>
                     </a:p>
                   </a:txBody>
@@ -23859,7 +23859,7 @@
                           <a:ea typeface="Malgun Gothic"/>
                           <a:cs typeface="Malgun Gothic"/>
                         </a:rPr>
-                        <a:t>후보 16개의 그룹 상대 이점, AWR 가중 flow matching, 모방 가중 0.5</a:t>
+                        <a:t>후보 16개의 그룹 상대 advantage, AWR 가중 flow matching, 모방 가중 0.5</a:t>
                       </a:r>
                     </a:p>
                   </a:txBody>
@@ -24316,7 +24316,7 @@
                 <a:ea typeface="Malgun Gothic"/>
                 <a:cs typeface="Malgun Gothic"/>
               </a:rPr>
-              <a:t> 다음 자리는 plant와 L1을 넣은 폐루프 후학습이다.</a:t>
+              <a:t> 다음에 쓸 곳은 plant와 L1을 넣은 폐루프 후학습이다.</a:t>
             </a:r>
           </a:p>
         </p:txBody>
@@ -24424,7 +24424,7 @@
                 <a:ea typeface="Malgun Gothic"/>
                 <a:cs typeface="Malgun Gothic"/>
               </a:rPr>
-              <a:t>시연으로 시작해 RL로 다듬고,</a:t>
+              <a:t>시연으로 시작해 RL로 fine-tuning하고,</a:t>
             </a:r>
           </a:p>
           <a:p>
@@ -24591,7 +24591,7 @@
                 <a:ea typeface="Malgun Gothic"/>
                 <a:cs typeface="Malgun Gothic"/>
               </a:rPr>
-              <a:t>2025년 연구는 생성 정책을 시연 근처에서 다듬는다</a:t>
+              <a:t>2025년 연구는 생성 정책을 시연 근처에서 fine-tuning한다</a:t>
             </a:r>
           </a:p>
         </p:txBody>
@@ -24615,10 +24615,10 @@
                 <a:tableStyleId>{5C22544A-7EE6-4342-B048-85BDC9FD1C3A}</a:tableStyleId>
               </a:tblPr>
               <a:tblGrid>
-                <a:gridCol w="3193653"/>
-                <a:gridCol w="3932734"/>
-                <a:gridCol w="1739602"/>
-                <a:gridCol w="1903611"/>
+                <a:gridCol w="3105944"/>
+                <a:gridCol w="4117975"/>
+                <a:gridCol w="1686024"/>
+                <a:gridCol w="1859657"/>
               </a:tblGrid>
               <a:tr h="314657">
                 <a:tc>
@@ -24718,7 +24718,7 @@
                   </a:tcPr>
                 </a:tc>
               </a:tr>
-              <a:tr h="306561">
+              <a:tr h="510570">
                 <a:tc>
                   <a:txBody>
                     <a:bodyPr wrap="square"/>
@@ -24757,7 +24757,7 @@
                           <a:ea typeface="Malgun Gothic"/>
                           <a:cs typeface="Malgun Gothic"/>
                         </a:rPr>
-                        <a:t>flow 경로에 학습 잡음을 넣어 가능도를 정확히 계산</a:t>
+                        <a:t>flow 경로에 학습 잡음을 넣어 likelihood를 정확히 계산</a:t>
                       </a:r>
                     </a:p>
                   </a:txBody>
@@ -24816,7 +24816,7 @@
                   </a:tcPr>
                 </a:tc>
               </a:tr>
-              <a:tr h="510570">
+              <a:tr h="306561">
                 <a:tc>
                   <a:txBody>
                     <a:bodyPr wrap="square"/>
@@ -24953,7 +24953,7 @@
                           <a:ea typeface="Malgun Gothic"/>
                           <a:cs typeface="Malgun Gothic"/>
                         </a:rPr>
-                        <a:t>묶음 critic과 행동 복제 flow에 묶은 best-of-N</a:t>
+                        <a:t>action chunk critic과 행동 복제 flow로 제약한 best-of-N</a:t>
                       </a:r>
                     </a:p>
                   </a:txBody>
@@ -25051,7 +25051,7 @@
                           <a:ea typeface="Malgun Gothic"/>
                           <a:cs typeface="Malgun Gothic"/>
                         </a:rPr>
-                        <a:t>무작위화 시뮬 앙상블의 분산을 안전 비용에 더한다</a:t>
+                        <a:t>랜덤화 시뮬 앙상블의 분산을 안전 비용에 더한다</a:t>
                       </a:r>
                     </a:p>
                   </a:txBody>
@@ -25247,7 +25247,7 @@
                           <a:ea typeface="Malgun Gothic"/>
                           <a:cs typeface="Malgun Gothic"/>
                         </a:rPr>
-                        <a:t>모방·오프라인·온라인을 자른 PPO 목표 하나로 잇는다</a:t>
+                        <a:t>모방·오프라인·온라인을 클리핑 PPO 목표 하나로 잇는다</a:t>
                       </a:r>
                     </a:p>
                   </a:txBody>
@@ -25271,7 +25271,7 @@
                           <a:ea typeface="Malgun Gothic"/>
                           <a:cs typeface="Malgun Gothic"/>
                         </a:rPr>
-                        <a:t>PPO(자른 목표)</a:t>
+                        <a:t>PPO(클리핑 목표)</a:t>
                       </a:r>
                     </a:p>
                   </a:txBody>
@@ -25526,7 +25526,7 @@
         </p:nvGraphicFramePr>
         <p:xfrm>
           <a:off x="711200" y="1361678"/>
-          <a:ext cx="10769599" cy="2457885"/>
+          <a:ext cx="10769600" cy="2865903"/>
         </p:xfrm>
         <a:graphic>
           <a:graphicData uri="http://schemas.openxmlformats.org/drawingml/2006/table">
@@ -25535,10 +25535,10 @@
                 <a:tableStyleId>{5C22544A-7EE6-4342-B048-85BDC9FD1C3A}</a:tableStyleId>
               </a:tblPr>
               <a:tblGrid>
-                <a:gridCol w="3935412"/>
-                <a:gridCol w="3301107"/>
-                <a:gridCol w="1917799"/>
-                <a:gridCol w="1615281"/>
+                <a:gridCol w="3641725"/>
+                <a:gridCol w="3714849"/>
+                <a:gridCol w="1861741"/>
+                <a:gridCol w="1551285"/>
               </a:tblGrid>
               <a:tr h="314657">
                 <a:tc>
@@ -25677,7 +25677,7 @@
                           <a:ea typeface="Malgun Gothic"/>
                           <a:cs typeface="Malgun Gothic"/>
                         </a:rPr>
-                        <a:t>표본별 비율 자르기와 비대칭 신뢰 영역</a:t>
+                        <a:t>샘플별 비율 클리핑과 비대칭 trust region</a:t>
                       </a:r>
                     </a:p>
                   </a:txBody>
@@ -26069,7 +26069,7 @@
                           <a:ea typeface="Malgun Gothic"/>
                           <a:cs typeface="Malgun Gothic"/>
                         </a:rPr>
-                        <a:t>깨끗한 사전학습 뒤 다섯 섭동 미세조정</a:t>
+                        <a:t>깨끗한 사전학습 뒤 다섯 섭동 fine-tuning</a:t>
                       </a:r>
                     </a:p>
                   </a:txBody>
@@ -26128,7 +26128,7 @@
                   </a:tcPr>
                 </a:tc>
               </a:tr>
-              <a:tr h="306561">
+              <a:tr h="510570">
                 <a:tc>
                   <a:txBody>
                     <a:bodyPr wrap="square"/>
@@ -26167,7 +26167,7 @@
                           <a:ea typeface="Malgun Gothic"/>
                           <a:cs typeface="Malgun Gothic"/>
                         </a:rPr>
-                        <a:t>HJ 도달 critic으로 점수 목표를 둘로 나눈다</a:t>
+                        <a:t>HJ reachability critic으로 score 목표를 둘로 나눈다</a:t>
                       </a:r>
                     </a:p>
                   </a:txBody>
@@ -26226,7 +26226,7 @@
                   </a:tcPr>
                 </a:tc>
               </a:tr>
-              <a:tr h="303862">
+              <a:tr h="507871">
                 <a:tc>
                   <a:txBody>
                     <a:bodyPr wrap="square"/>
@@ -26621,7 +26621,7 @@
                 <a:ea typeface="Malgun Gothic"/>
                 <a:cs typeface="Malgun Gothic"/>
               </a:rPr>
-              <a:t>1 · 시연으로 시작하고 RL로 다듬는다</a:t>
+              <a:t>1 · 시연으로 시작하고 RL로 fine-tuning한다</a:t>
             </a:r>
           </a:p>
         </p:txBody>
@@ -26662,7 +26662,7 @@
                 <a:ea typeface="Malgun Gothic"/>
                 <a:cs typeface="Malgun Gothic"/>
               </a:rPr>
-              <a:t>다듬을 때도 시연 정책 가까이에 묶는다(DSRL, Q-chunking, FINO, Dreamer 4의 KL).</a:t>
+              <a:t>fine-tuning할 때도 시연 정책에서 멀어지지 않게 제약한다(DSRL, Q-chunking, FINO, Dreamer 4의 KL).</a:t>
             </a:r>
           </a:p>
         </p:txBody>
@@ -26852,7 +26852,7 @@
                 <a:ea typeface="Malgun Gothic"/>
                 <a:cs typeface="Malgun Gothic"/>
               </a:rPr>
-              <a:t>2 · 로그 확률을 피한다</a:t>
+              <a:t>2 · log-probability 계산을 피한다</a:t>
             </a:r>
           </a:p>
         </p:txBody>
@@ -27083,7 +27083,7 @@
                 <a:ea typeface="Malgun Gothic"/>
                 <a:cs typeface="Malgun Gothic"/>
               </a:rPr>
-              <a:t>3 · critic이 자료 밖에서 틀리는 것을 막는다</a:t>
+              <a:t>3 · critic이 데이터 분포 밖에서 틀리는 것을 막는다</a:t>
             </a:r>
           </a:p>
         </p:txBody>
@@ -27124,7 +27124,7 @@
                 <a:ea typeface="Malgun Gothic"/>
                 <a:cs typeface="Malgun Gothic"/>
               </a:rPr>
-              <a:t>기울기를 자르거나, 자료 정책에 묶거나, 불확실성을 비용에 더한다.</a:t>
+              <a:t>기울기를 클리핑하거나, 데이터 수집 정책 가까이 유지하거나, 불확실성을 비용에 더한다.</a:t>
             </a:r>
           </a:p>
         </p:txBody>
@@ -27355,7 +27355,7 @@
                 <a:ea typeface="Malgun Gothic"/>
                 <a:cs typeface="Malgun Gothic"/>
               </a:rPr>
-              <a:t>행동 지연이 무작위화나 섭동의 항목이다(FastSAC 보행, FPO++, NavRL++).</a:t>
+              <a:t>행동 지연이 랜덤화나 섭동의 항목이다(FastSAC 보행, FPO++, NavRL++).</a:t>
             </a:r>
           </a:p>
         </p:txBody>
@@ -27586,7 +27586,7 @@
                 <a:ea typeface="Malgun Gothic"/>
                 <a:cs typeface="Malgun Gothic"/>
               </a:rPr>
-              <a:t>환경 1,024–16,384개를 한 GPU 묶음에서 돌린다.</a:t>
+              <a:t>환경 1,024–16,384개를 한 GPU 배치로 돌린다.</a:t>
             </a:r>
           </a:p>
         </p:txBody>
@@ -27792,7 +27792,7 @@
         </p:nvGraphicFramePr>
         <p:xfrm>
           <a:off x="711200" y="1361678"/>
-          <a:ext cx="10769600" cy="2660799"/>
+          <a:ext cx="10769600" cy="2864808"/>
         </p:xfrm>
         <a:graphic>
           <a:graphicData uri="http://schemas.openxmlformats.org/drawingml/2006/table">
@@ -27801,10 +27801,10 @@
                 <a:tableStyleId>{5C22544A-7EE6-4342-B048-85BDC9FD1C3A}</a:tableStyleId>
               </a:tblPr>
               <a:tblGrid>
-                <a:gridCol w="1250553"/>
-                <a:gridCol w="2712045"/>
-                <a:gridCol w="2744887"/>
-                <a:gridCol w="4062115"/>
+                <a:gridCol w="1221383"/>
+                <a:gridCol w="2626717"/>
+                <a:gridCol w="3029545"/>
+                <a:gridCol w="3891955"/>
               </a:tblGrid>
               <a:tr h="314657">
                 <a:tc>
@@ -27967,7 +27967,7 @@
                           <a:ea typeface="Malgun Gothic"/>
                           <a:cs typeface="Malgun Gothic"/>
                         </a:rPr>
-                        <a:t>재생 버퍼(FastSAC, QF3, Q-chunking)</a:t>
+                        <a:t>replay buffer(FastSAC, QF3, Q-chunking)</a:t>
                       </a:r>
                     </a:p>
                   </a:txBody>
@@ -28065,7 +28065,7 @@
                           <a:ea typeface="Malgun Gothic"/>
                           <a:cs typeface="Malgun Gothic"/>
                         </a:rPr>
-                        <a:t>얼리고 잡음·선택만 배운다(DSRL)</a:t>
+                        <a:t>고정하고 잡음·선택만 배운다(DSRL)</a:t>
                       </a:r>
                     </a:p>
                   </a:txBody>
@@ -28089,7 +28089,7 @@
                           <a:ea typeface="Malgun Gothic"/>
                           <a:cs typeface="Malgun Gothic"/>
                         </a:rPr>
-                        <a:t>얼리면 안전하지만 시연이 못 내는 행동은 끝내 못 낸다</a:t>
+                        <a:t>고정하면 안전하지만 시연이 못 내는 행동은 끝내 못 낸다</a:t>
                       </a:r>
                     </a:p>
                   </a:txBody>
@@ -28139,7 +28139,7 @@
                           <a:ea typeface="Malgun Gothic"/>
                           <a:cs typeface="Malgun Gothic"/>
                         </a:rPr>
-                        <a:t>시뮬을 직접 굴린다(FPO++)</a:t>
+                        <a:t>시뮬을 직접 돌린다(FPO++)</a:t>
                       </a:r>
                     </a:p>
                   </a:txBody>
@@ -28296,7 +28296,7 @@
                   </a:tcPr>
                 </a:tc>
               </a:tr>
-              <a:tr h="303862">
+              <a:tr h="507871">
                 <a:tc>
                   <a:txBody>
                     <a:bodyPr wrap="square"/>
@@ -28515,11 +28515,11 @@
         <p:spPr>
           <a:xfrm>
             <a:off x="711200" y="1361678"/>
-            <a:ext cx="5308600" cy="1137841"/>
+            <a:ext cx="5308600" cy="1358801"/>
           </a:xfrm>
           <a:prstGeom prst="roundRect">
             <a:avLst>
-              <a:gd name="adj" fmla="val 6696"/>
+              <a:gd name="adj" fmla="val 5607"/>
             </a:avLst>
           </a:prstGeom>
           <a:solidFill>
@@ -28575,7 +28575,7 @@
         <p:spPr>
           <a:xfrm>
             <a:off x="6013450" y="1361678"/>
-            <a:ext cx="6350" cy="1137841"/>
+            <a:ext cx="6350" cy="1358801"/>
           </a:xfrm>
           <a:prstGeom prst="rect">
             <a:avLst/>
@@ -28603,7 +28603,7 @@
         </p:nvSpPr>
         <p:spPr>
           <a:xfrm>
-            <a:off x="711200" y="2493169"/>
+            <a:off x="711200" y="2714129"/>
             <a:ext cx="5308600" cy="6350"/>
           </a:xfrm>
           <a:prstGeom prst="rect">
@@ -28633,7 +28633,7 @@
         <p:spPr>
           <a:xfrm>
             <a:off x="711200" y="1361678"/>
-            <a:ext cx="50800" cy="1137841"/>
+            <a:ext cx="50800" cy="1358801"/>
           </a:xfrm>
           <a:prstGeom prst="roundRect">
             <a:avLst>
@@ -28818,11 +28818,11 @@
         <p:spPr>
           <a:xfrm>
             <a:off x="6172200" y="1361678"/>
-            <a:ext cx="5308600" cy="1137841"/>
+            <a:ext cx="5308600" cy="1358801"/>
           </a:xfrm>
           <a:prstGeom prst="roundRect">
             <a:avLst>
-              <a:gd name="adj" fmla="val 6696"/>
+              <a:gd name="adj" fmla="val 5607"/>
             </a:avLst>
           </a:prstGeom>
           <a:solidFill>
@@ -28878,7 +28878,7 @@
         <p:spPr>
           <a:xfrm>
             <a:off x="11474450" y="1361678"/>
-            <a:ext cx="6350" cy="1137841"/>
+            <a:ext cx="6350" cy="1358801"/>
           </a:xfrm>
           <a:prstGeom prst="rect">
             <a:avLst/>
@@ -28906,7 +28906,7 @@
         </p:nvSpPr>
         <p:spPr>
           <a:xfrm>
-            <a:off x="6172200" y="2493169"/>
+            <a:off x="6172200" y="2714129"/>
             <a:ext cx="5308600" cy="6350"/>
           </a:xfrm>
           <a:prstGeom prst="rect">
@@ -28936,7 +28936,7 @@
         <p:spPr>
           <a:xfrm>
             <a:off x="6172200" y="1361678"/>
-            <a:ext cx="50800" cy="1137841"/>
+            <a:ext cx="50800" cy="1358801"/>
           </a:xfrm>
           <a:prstGeom prst="roundRect">
             <a:avLst>
@@ -29080,7 +29080,7 @@
         <p:spPr>
           <a:xfrm>
             <a:off x="6388100" y="2132509"/>
-            <a:ext cx="5094288" cy="327000"/>
+            <a:ext cx="5094288" cy="603200"/>
           </a:xfrm>
           <a:prstGeom prst="rect">
             <a:avLst/>
@@ -29107,7 +29107,7 @@
                 <a:ea typeface="Malgun Gothic"/>
                 <a:cs typeface="Malgun Gothic"/>
               </a:rPr>
-              <a:t>같은 그룹 이점에 표본별 비율과 자른 목표를 쓴다. ASPO는 끈 판도 잰다.</a:t>
+              <a:t>같은 그룹 advantage에 샘플별 비율과 클리핑 목표를 쓴다. ASPO는 끈 설정도 잰다.</a:t>
             </a:r>
           </a:p>
         </p:txBody>
@@ -29120,7 +29120,7 @@
         </p:nvSpPr>
         <p:spPr>
           <a:xfrm>
-            <a:off x="711200" y="2651919"/>
+            <a:off x="711200" y="2872879"/>
             <a:ext cx="5308600" cy="1137841"/>
           </a:xfrm>
           <a:prstGeom prst="roundRect">
@@ -29151,7 +29151,7 @@
         </p:nvSpPr>
         <p:spPr>
           <a:xfrm>
-            <a:off x="711200" y="2651919"/>
+            <a:off x="711200" y="2872879"/>
             <a:ext cx="5308600" cy="6350"/>
           </a:xfrm>
           <a:prstGeom prst="rect">
@@ -29180,7 +29180,7 @@
         </p:nvSpPr>
         <p:spPr>
           <a:xfrm>
-            <a:off x="6013450" y="2651919"/>
+            <a:off x="6013450" y="2872879"/>
             <a:ext cx="6350" cy="1137841"/>
           </a:xfrm>
           <a:prstGeom prst="rect">
@@ -29209,7 +29209,7 @@
         </p:nvSpPr>
         <p:spPr>
           <a:xfrm>
-            <a:off x="711200" y="3783409"/>
+            <a:off x="711200" y="4004370"/>
             <a:ext cx="5308600" cy="6350"/>
           </a:xfrm>
           <a:prstGeom prst="rect">
@@ -29238,7 +29238,7 @@
         </p:nvSpPr>
         <p:spPr>
           <a:xfrm>
-            <a:off x="711200" y="2651919"/>
+            <a:off x="711200" y="2872879"/>
             <a:ext cx="50800" cy="1137841"/>
           </a:xfrm>
           <a:prstGeom prst="roundRect">
@@ -29269,7 +29269,7 @@
         </p:nvSpPr>
         <p:spPr>
           <a:xfrm>
-            <a:off x="927100" y="2797969"/>
+            <a:off x="927100" y="3018929"/>
             <a:ext cx="949027" cy="241300"/>
           </a:xfrm>
           <a:prstGeom prst="roundRect">
@@ -29300,7 +29300,7 @@
         </p:nvSpPr>
         <p:spPr>
           <a:xfrm>
-            <a:off x="1016000" y="2823369"/>
+            <a:off x="1016000" y="3044329"/>
             <a:ext cx="819764" cy="288925"/>
           </a:xfrm>
           <a:prstGeom prst="rect">
@@ -29341,7 +29341,7 @@
         </p:nvSpPr>
         <p:spPr>
           <a:xfrm>
-            <a:off x="927100" y="3115469"/>
+            <a:off x="927100" y="3336429"/>
             <a:ext cx="5094288" cy="339651"/>
           </a:xfrm>
           <a:prstGeom prst="rect">
@@ -29369,7 +29369,7 @@
                 <a:ea typeface="Malgun Gothic"/>
                 <a:cs typeface="Malgun Gothic"/>
               </a:rPr>
-              <a:t>MPPI에 학습한 끝 가치 더하기</a:t>
+              <a:t>MPPI에 학습한 terminal value 더하기</a:t>
             </a:r>
           </a:p>
         </p:txBody>
@@ -29382,7 +29382,7 @@
         </p:nvSpPr>
         <p:spPr>
           <a:xfrm>
-            <a:off x="927100" y="3422749"/>
+            <a:off x="927100" y="3643709"/>
             <a:ext cx="5094288" cy="327000"/>
           </a:xfrm>
           <a:prstGeom prst="rect">
@@ -29410,7 +29410,7 @@
                 <a:ea typeface="Malgun Gothic"/>
                 <a:cs typeface="Malgun Gothic"/>
               </a:rPr>
-              <a:t>GP 평균은 치명을 0으로 했지만 멈춤이 늘었다. 지평 너머 진행을 본다.</a:t>
+              <a:t>GP 평균은 치명을 0으로 했지만 멈춤이 늘었다. horizon 너머의 진행을 반영한다.</a:t>
             </a:r>
           </a:p>
         </p:txBody>
@@ -29423,7 +29423,7 @@
         </p:nvSpPr>
         <p:spPr>
           <a:xfrm>
-            <a:off x="6172200" y="2651919"/>
+            <a:off x="6172200" y="2872879"/>
             <a:ext cx="5308600" cy="1137841"/>
           </a:xfrm>
           <a:prstGeom prst="roundRect">
@@ -29454,7 +29454,7 @@
         </p:nvSpPr>
         <p:spPr>
           <a:xfrm>
-            <a:off x="6172200" y="2651919"/>
+            <a:off x="6172200" y="2872879"/>
             <a:ext cx="5308600" cy="6350"/>
           </a:xfrm>
           <a:prstGeom prst="rect">
@@ -29483,7 +29483,7 @@
         </p:nvSpPr>
         <p:spPr>
           <a:xfrm>
-            <a:off x="11474450" y="2651919"/>
+            <a:off x="11474450" y="2872879"/>
             <a:ext cx="6350" cy="1137841"/>
           </a:xfrm>
           <a:prstGeom prst="rect">
@@ -29512,7 +29512,7 @@
         </p:nvSpPr>
         <p:spPr>
           <a:xfrm>
-            <a:off x="6172200" y="3783409"/>
+            <a:off x="6172200" y="4004370"/>
             <a:ext cx="5308600" cy="6350"/>
           </a:xfrm>
           <a:prstGeom prst="rect">
@@ -29541,7 +29541,7 @@
         </p:nvSpPr>
         <p:spPr>
           <a:xfrm>
-            <a:off x="6172200" y="2651919"/>
+            <a:off x="6172200" y="2872879"/>
             <a:ext cx="50800" cy="1137841"/>
           </a:xfrm>
           <a:prstGeom prst="roundRect">
@@ -29572,7 +29572,7 @@
         </p:nvSpPr>
         <p:spPr>
           <a:xfrm>
-            <a:off x="6388100" y="2797969"/>
+            <a:off x="6388100" y="3018929"/>
             <a:ext cx="841573" cy="241300"/>
           </a:xfrm>
           <a:prstGeom prst="roundRect">
@@ -29603,7 +29603,7 @@
         </p:nvSpPr>
         <p:spPr>
           <a:xfrm>
-            <a:off x="6477000" y="2823369"/>
+            <a:off x="6477000" y="3044329"/>
             <a:ext cx="709087" cy="288925"/>
           </a:xfrm>
           <a:prstGeom prst="rect">
@@ -29644,7 +29644,7 @@
         </p:nvSpPr>
         <p:spPr>
           <a:xfrm>
-            <a:off x="6388100" y="3115469"/>
+            <a:off x="6388100" y="3336429"/>
             <a:ext cx="5094288" cy="339651"/>
           </a:xfrm>
           <a:prstGeom prst="rect">
@@ -29672,7 +29672,7 @@
                 <a:ea typeface="Malgun Gothic"/>
                 <a:cs typeface="Malgun Gothic"/>
               </a:rPr>
-              <a:t>plant·L1 섭동 미세조정</a:t>
+              <a:t>plant·L1 섭동 fine-tuning</a:t>
             </a:r>
           </a:p>
         </p:txBody>
@@ -29685,7 +29685,7 @@
         </p:nvSpPr>
         <p:spPr>
           <a:xfrm>
-            <a:off x="6388100" y="3422749"/>
+            <a:off x="6388100" y="3643709"/>
             <a:ext cx="5094288" cy="327000"/>
           </a:xfrm>
           <a:prstGeom prst="rect">
@@ -29713,7 +29713,7 @@
                 <a:ea typeface="Malgun Gothic"/>
                 <a:cs typeface="Malgun Gothic"/>
               </a:rPr>
-              <a:t>NavRL++에서 합성곱 정책은 92.85 %→77.30 %로 퇴행했다. 퇴행부터 잰다.</a:t>
+              <a:t>NavRL++에서 CNN 정책은 92.85 %→77.30 %로 퇴행했다. 퇴행부터 잰다.</a:t>
             </a:r>
           </a:p>
         </p:txBody>
@@ -29726,7 +29726,7 @@
         </p:nvSpPr>
         <p:spPr>
           <a:xfrm>
-            <a:off x="711200" y="3967559"/>
+            <a:off x="711200" y="4188520"/>
             <a:ext cx="10769600" cy="502543"/>
           </a:xfrm>
           <a:prstGeom prst="roundRect">
@@ -29757,7 +29757,7 @@
         </p:nvSpPr>
         <p:spPr>
           <a:xfrm>
-            <a:off x="889000" y="4094559"/>
+            <a:off x="889000" y="4315520"/>
             <a:ext cx="10751820" cy="361479"/>
           </a:xfrm>
           <a:prstGeom prst="rect">
@@ -29904,7 +29904,7 @@
                 <a:ea typeface="Malgun Gothic"/>
                 <a:cs typeface="Malgun Gothic"/>
               </a:rPr>
-              <a:t>후학습은 표본을 낫게 했지만</a:t>
+              <a:t>후학습은 학습 샘플을 낫게 했지만</a:t>
             </a:r>
           </a:p>
           <a:p>
@@ -29963,7 +29963,7 @@
                 <a:ea typeface="Malgun Gothic"/>
                 <a:cs typeface="Malgun Gothic"/>
               </a:rPr>
-              <a:t>TP-0066의 결과, 갱신 한 번의 계산, 2단계 시도, 판정의 통계, 다음 자리 순서로 본다.</a:t>
+              <a:t>TP-0066의 결과, 갱신 한 번의 계산, 2단계 시도, 판정의 통계, 다음 후보 순서로 살펴본다.</a:t>
             </a:r>
           </a:p>
         </p:txBody>
@@ -30720,7 +30720,7 @@
                 <a:ea typeface="Malgun Gothic"/>
                 <a:cs typeface="Malgun Gothic"/>
               </a:rPr>
-              <a:t> RL은 학습 표본을 낫게 만들지만, 단독으로는 아직 판정(27/30) 아래다.</a:t>
+              <a:t> RL은 학습 샘플을 낫게 만들지만, 단독으로는 아직 판정(27/30) 아래다.</a:t>
             </a:r>
           </a:p>
         </p:txBody>
@@ -30828,7 +30828,7 @@
                 <a:ea typeface="Malgun Gothic"/>
                 <a:cs typeface="Malgun Gothic"/>
               </a:rPr>
-              <a:t>갱신 한 번은 후보 16개를 굴려 점수로 가중한다</a:t>
+              <a:t>갱신 한 번은 후보 16개를 rollout해 점수로 가중한다</a:t>
             </a:r>
           </a:p>
         </p:txBody>
@@ -31447,7 +31447,7 @@
                 <a:ea typeface="Malgun Gothic"/>
                 <a:cs typeface="Malgun Gothic"/>
               </a:rPr>
-              <a:t>SwerveModel로 굴려 GT 지도에서 채점한다(R.9)</a:t>
+              <a:t>SwerveModel로 rollout해 GT 지도에서 채점한다(R.9)</a:t>
             </a:r>
           </a:p>
         </p:txBody>
@@ -31676,7 +31676,7 @@
                 <a:ea typeface="Malgun Gothic"/>
                 <a:cs typeface="Malgun Gothic"/>
               </a:rPr>
-              <a:t>그룹 이점</a:t>
+              <a:t>그룹 advantage</a:t>
             </a:r>
           </a:p>
         </p:txBody>
@@ -32784,7 +32784,7 @@
                 <a:ea typeface="Malgun Gothic"/>
                 <a:cs typeface="Malgun Gothic"/>
               </a:rPr>
-              <a:t>R.0 · 자료와 최적화</a:t>
+              <a:t>R.0 · 데이터와 최적화</a:t>
             </a:r>
           </a:p>
         </p:txBody>
@@ -32947,9 +32947,9 @@
                 <a:tableStyleId>{5C22544A-7EE6-4342-B048-85BDC9FD1C3A}</a:tableStyleId>
               </a:tblPr>
               <a:tblGrid>
-                <a:gridCol w="1998563"/>
-                <a:gridCol w="4427637"/>
-                <a:gridCol w="4343400"/>
+                <a:gridCol w="1907381"/>
+                <a:gridCol w="4225727"/>
+                <a:gridCol w="4636492"/>
               </a:tblGrid>
               <a:tr h="314657">
                 <a:tc>
@@ -33076,7 +33076,7 @@
                           <a:ea typeface="Malgun Gothic"/>
                           <a:cs typeface="Malgun Gothic"/>
                         </a:rPr>
-                        <a:t>궤적을 굴려 받은 점수(도달 +, 치명 셀 −)</a:t>
+                        <a:t>궤적을 rollout해 받은 점수(도달 +, 치명 셀 −)</a:t>
                       </a:r>
                     </a:p>
                   </a:txBody>
@@ -33200,7 +33200,7 @@
                           <a:ea typeface="Malgun Gothic"/>
                           <a:cs typeface="Malgun Gothic"/>
                         </a:rPr>
-                        <a:t>시연(교사)</a:t>
+                        <a:t>시연(teacher)</a:t>
                       </a:r>
                     </a:p>
                   </a:txBody>
@@ -33224,7 +33224,7 @@
                           <a:ea typeface="Malgun Gothic"/>
                           <a:cs typeface="Malgun Gothic"/>
                         </a:rPr>
-                        <a:t>표본(시뮬레이터)</a:t>
+                        <a:t>샘플(시뮬레이터)</a:t>
                       </a:r>
                     </a:p>
                   </a:txBody>
@@ -34414,7 +34414,7 @@
                 <a:ea typeface="Malgun Gothic"/>
                 <a:cs typeface="Malgun Gothic"/>
               </a:rPr>
-              <a:t>다음 자리는 plant와 L1을 넣은 폐루프 후학습이다</a:t>
+              <a:t>다음에 쓸 곳은 plant와 L1을 넣은 폐루프 후학습이다</a:t>
             </a:r>
           </a:p>
         </p:txBody>
@@ -35020,7 +35020,7 @@
                 <a:ea typeface="Malgun Gothic"/>
                 <a:cs typeface="Malgun Gothic"/>
               </a:rPr>
-              <a:t>critic을 더하면 actor-critic으로 넘어간다. 가중치를 두고 시작 잡음만 배우는 DSRL도 있다.</a:t>
+              <a:t>critic을 더하면 actor-critic으로 넘어간다. 가중치는 고정하고 시작 잡음만 배우는 DSRL도 있다.</a:t>
             </a:r>
           </a:p>
         </p:txBody>
@@ -35585,7 +35585,7 @@
                 <a:ea typeface="Malgun Gothic"/>
                 <a:cs typeface="Malgun Gothic"/>
               </a:rPr>
-              <a:t>오프라인 자료</a:t>
+              <a:t>오프라인 데이터</a:t>
             </a:r>
           </a:p>
         </p:txBody>
@@ -35637,7 +35637,7 @@
                 <a:ea typeface="Malgun Gothic"/>
                 <a:cs typeface="Malgun Gothic"/>
               </a:rPr>
-              <a:t>의 기록을 IQL식으로 쓴다. 자료 정책보다 나아질 수 있는지부터 작게 잰다.</a:t>
+              <a:t>의 기록을 IQL식으로 쓴다. 데이터를 모은 정책보다 나아질 수 있는지부터 작게 잰다.</a:t>
             </a:r>
           </a:p>
         </p:txBody>
@@ -35828,7 +35828,7 @@
                 <a:ea typeface="Malgun Gothic"/>
                 <a:cs typeface="Malgun Gothic"/>
               </a:rPr>
-              <a:t>시연으로 시작하고, 표본으로 다듬고, 꼬리로 판정한다</a:t>
+              <a:t>시연으로 시작하고, 샘플로 fine-tuning하고, 꼬리로 판정한다</a:t>
             </a:r>
           </a:p>
         </p:txBody>
@@ -36018,7 +36018,7 @@
                 <a:ea typeface="Malgun Gothic"/>
                 <a:cs typeface="Malgun Gothic"/>
               </a:rPr>
-              <a:t>세 자리</a:t>
+              <a:t>세 곳</a:t>
             </a:r>
           </a:p>
         </p:txBody>
@@ -37840,7 +37840,7 @@
                 <a:ea typeface="Malgun Gothic"/>
                 <a:cs typeface="Malgun Gothic"/>
               </a:rPr>
-              <a:t>여기서 강화학습의 세 어려움이 나온다. 신용 할당, 탐색, 분포 이동이다.</a:t>
+              <a:t>여기서 강화학습의 세 어려움이 나온다. credit assignment, 탐색, 분포 이동이다.</a:t>
             </a:r>
           </a:p>
         </p:txBody>
@@ -38593,7 +38593,7 @@
                 <a:ea typeface="Malgun Gothic"/>
                 <a:cs typeface="Malgun Gothic"/>
               </a:rPr>
-              <a:t>(a) 시연 띠 밖에서 틀린 정책을 25번 굴리면 10번이 보도 끝을 넘는다 (b) 누적 실수 (c) 양쪽 회피 시연을 평균하면 나무로 간다 — scripts/make_rl_figures.py</a:t>
+              <a:t>(a) 시연 영역 밖에서 틀리는 정책을 25번 rollout하면 10번이 보도 끝을 넘는다 (b) 누적 실수 (c) 양쪽 회피 시연을 평균하면 나무로 간다 — scripts/make_rl_figures.py</a:t>
             </a:r>
           </a:p>
         </p:txBody>
@@ -38940,7 +38940,7 @@
                 <a:ea typeface="Malgun Gothic"/>
                 <a:cs typeface="Malgun Gothic"/>
               </a:rPr>
-              <a:t>보상도 시뮬레이터도 미분하지 않는다. 대가는 큰 분산이고, 이 장은 그 분산을 줄이는 요령들이다.</a:t>
+              <a:t>보상도 시뮬레이터도 미분하지 않는다. 대가는 큰 분산이고, 이 장은 그 분산을 줄이는 기법들을 다룬다.</a:t>
             </a:r>
           </a:p>
         </p:txBody>
@@ -39232,7 +39232,7 @@
                 <a:ea typeface="Malgun Gothic"/>
                 <a:cs typeface="Malgun Gothic"/>
               </a:rPr>
-              <a:t>표본 16개로 낸 기울기 추정: 기준선이 없으면 표준편차 5.8, 배치 평균을 빼면 1.6이다. 평균은 둘 다 참값 4 — scripts/make_rl_figures.py</a:t>
+              <a:t>샘플 16개로 낸 기울기 추정: 기준선이 없으면 표준편차 5.8, 배치 평균을 빼면 1.6이다. 평균은 둘 다 참값 4 — scripts/make_rl_figures.py</a:t>
             </a:r>
           </a:p>
         </p:txBody>
